--- a/python-course-ppt/逐节课件/Python讲授课件-单元17.pptx
+++ b/python-course-ppt/逐节课件/Python讲授课件-单元17.pptx
@@ -327,6 +327,80 @@
           </a:p>
         </p:txBody>
       </p:sp>
+      <p:sp>
+        <p:nvSpPr>
+          <p:cNvPr id="2" name="讲课提示"/>
+          <p:cNvSpPr txBox="1"/>
+          <p:nvPr/>
+        </p:nvSpPr>
+        <p:spPr>
+          <a:xfrm>
+            <a:off x="457200" y="457200"/>
+            <a:ext cx="6858000" cy="4800600"/>
+          </a:xfrm>
+          <a:prstGeom prst="rect">
+            <a:avLst/>
+          </a:prstGeom>
+        </p:spPr>
+        <p:txBody>
+          <a:bodyPr wrap="square"/>
+          <a:lstStyle/>
+          <a:p>
+            <a:r>
+              <a:rPr lang="zh-CN" dirty="0"/>
+              <a:t>单元 17 · 单元 17 · 使用 API 与 Plotly</a:t>
+            </a:r>
+          </a:p>
+          <a:p>
+            <a:r>
+              <a:rPr lang="zh-CN" dirty="0"/>
+              <a:t/>
+            </a:r>
+          </a:p>
+          <a:p>
+            <a:r>
+              <a:rPr lang="zh-CN" dirty="0"/>
+              <a:t>本单元包含以下课节：</a:t>
+            </a:r>
+          </a:p>
+          <a:p>
+            <a:r>
+              <a:rPr lang="zh-CN" dirty="0"/>
+              <a:t>· 第 88 节 API 概念与 Requests</a:t>
+            </a:r>
+          </a:p>
+          <a:p>
+            <a:r>
+              <a:rPr lang="zh-CN" dirty="0"/>
+              <a:t>· 第 89 节 GitHub API 与速率限制</a:t>
+            </a:r>
+          </a:p>
+          <a:p>
+            <a:r>
+              <a:rPr lang="zh-CN" dirty="0"/>
+              <a:t>· 第 90 节 Plotly 可视化与可点击链接</a:t>
+            </a:r>
+          </a:p>
+          <a:p>
+            <a:r>
+              <a:rPr lang="zh-CN" dirty="0"/>
+              <a:t>· 第 91 节 Hacker News API 与动手实战</a:t>
+            </a:r>
+          </a:p>
+          <a:p>
+            <a:r>
+              <a:rPr lang="zh-CN" dirty="0"/>
+              <a:t/>
+            </a:r>
+          </a:p>
+          <a:p>
+            <a:r>
+              <a:rPr lang="zh-CN" dirty="0"/>
+              <a:t>开场用 3 分钟讲清：这个单元学完能做出什么，最后会被关卡怎么验。</a:t>
+            </a:r>
+          </a:p>
+        </p:txBody>
+      </p:sp>
     </p:spTree>
   </p:cSld>
   <p:clrMapOvr>
@@ -396,6 +470,50 @@
           </a:p>
         </p:txBody>
       </p:sp>
+      <p:sp>
+        <p:nvSpPr>
+          <p:cNvPr id="2" name="讲课提示"/>
+          <p:cNvSpPr txBox="1"/>
+          <p:nvPr/>
+        </p:nvSpPr>
+        <p:spPr>
+          <a:xfrm>
+            <a:off x="457200" y="457200"/>
+            <a:ext cx="6858000" cy="4800600"/>
+          </a:xfrm>
+          <a:prstGeom prst="rect">
+            <a:avLst/>
+          </a:prstGeom>
+        </p:spPr>
+        <p:txBody>
+          <a:bodyPr wrap="square"/>
+          <a:lstStyle/>
+          <a:p>
+            <a:r>
+              <a:rPr lang="zh-CN" dirty="0"/>
+              <a:t>单元 17 小结 · 单元 17 · 小结</a:t>
+            </a:r>
+          </a:p>
+          <a:p>
+            <a:r>
+              <a:rPr lang="zh-CN" dirty="0"/>
+              <a:t/>
+            </a:r>
+          </a:p>
+          <a:p>
+            <a:r>
+              <a:rPr lang="zh-CN" dirty="0"/>
+              <a:t>收尾动作：让学生合上讲义，口述本单元三个最重要的结论；说不出来的，回对应课节。</a:t>
+            </a:r>
+          </a:p>
+          <a:p>
+            <a:r>
+              <a:rPr lang="zh-CN" dirty="0"/>
+              <a:t>然后当场勾一遍本单元课节的「已完成」，没打勾的进下一单元前补掉。</a:t>
+            </a:r>
+          </a:p>
+        </p:txBody>
+      </p:sp>
     </p:spTree>
   </p:cSld>
   <p:clrMapOvr>
@@ -519,6 +637,104 @@
           </a:p>
         </p:txBody>
       </p:sp>
+      <p:sp>
+        <p:nvSpPr>
+          <p:cNvPr id="2" name="讲课提示"/>
+          <p:cNvSpPr txBox="1"/>
+          <p:nvPr/>
+        </p:nvSpPr>
+        <p:spPr>
+          <a:xfrm>
+            <a:off x="457200" y="457200"/>
+            <a:ext cx="6858000" cy="4800600"/>
+          </a:xfrm>
+          <a:prstGeom prst="rect">
+            <a:avLst/>
+          </a:prstGeom>
+        </p:spPr>
+        <p:txBody>
+          <a:bodyPr wrap="square"/>
+          <a:lstStyle/>
+          <a:p>
+            <a:r>
+              <a:rPr lang="zh-CN" dirty="0"/>
+              <a:t>第 88 节 · API 概念与 Requests</a:t>
+            </a:r>
+          </a:p>
+          <a:p>
+            <a:r>
+              <a:rPr lang="zh-CN" dirty="0"/>
+              <a:t>单元 17 · 使用 API 与 Plotly · W21</a:t>
+            </a:r>
+          </a:p>
+          <a:p>
+            <a:r>
+              <a:rPr lang="zh-CN" dirty="0"/>
+              <a:t/>
+            </a:r>
+          </a:p>
+          <a:p>
+            <a:r>
+              <a:rPr lang="zh-CN" dirty="0"/>
+              <a:t>学习目标：理解 API 是什么；会用 requests.get 并检查 status_code、用 .json() 拿字典</a:t>
+            </a:r>
+          </a:p>
+          <a:p>
+            <a:r>
+              <a:rPr lang="zh-CN" dirty="0"/>
+              <a:t/>
+            </a:r>
+          </a:p>
+          <a:p>
+            <a:r>
+              <a:rPr lang="zh-CN" dirty="0"/>
+              <a:t>课堂实操（40 分钟，不看答案）：</a:t>
+            </a:r>
+          </a:p>
+          <a:p>
+            <a:r>
+              <a:rPr lang="zh-CN" dirty="0"/>
+              <a:t>· 发一次请求并打印 status_code 与响应前 200 字符</a:t>
+            </a:r>
+          </a:p>
+          <a:p>
+            <a:r>
+              <a:rPr lang="zh-CN" dirty="0"/>
+              <a:t>· 故意请求一个不存在的 URL 看 404</a:t>
+            </a:r>
+          </a:p>
+          <a:p>
+            <a:r>
+              <a:rPr lang="zh-CN" dirty="0"/>
+              <a:t/>
+            </a:r>
+          </a:p>
+          <a:p>
+            <a:r>
+              <a:rPr lang="zh-CN" dirty="0"/>
+              <a:t>课后作业：</a:t>
+            </a:r>
+          </a:p>
+          <a:p>
+            <a:r>
+              <a:rPr lang="zh-CN" dirty="0"/>
+              <a:t>· 装好 requests 并跑通第一个 API 调用</a:t>
+            </a:r>
+          </a:p>
+          <a:p>
+            <a:r>
+              <a:rPr lang="zh-CN" dirty="0"/>
+              <a:t/>
+            </a:r>
+          </a:p>
+          <a:p>
+            <a:r>
+              <a:rPr lang="zh-CN" dirty="0"/>
+              <a:t>节奏：讲 20 分钟 → 学员自己敲 40 分钟（不看答案）→ 对讲评自查 20 分钟 → 写作业 10 分钟。</a:t>
+            </a:r>
+          </a:p>
+        </p:txBody>
+      </p:sp>
     </p:spTree>
   </p:cSld>
   <p:clrMapOvr>
@@ -612,6 +828,74 @@
           </a:p>
         </p:txBody>
       </p:sp>
+      <p:sp>
+        <p:nvSpPr>
+          <p:cNvPr id="2" name="讲课提示"/>
+          <p:cNvSpPr txBox="1"/>
+          <p:nvPr/>
+        </p:nvSpPr>
+        <p:spPr>
+          <a:xfrm>
+            <a:off x="457200" y="457200"/>
+            <a:ext cx="6858000" cy="4800600"/>
+          </a:xfrm>
+          <a:prstGeom prst="rect">
+            <a:avLst/>
+          </a:prstGeom>
+        </p:spPr>
+        <p:txBody>
+          <a:bodyPr wrap="square"/>
+          <a:lstStyle/>
+          <a:p>
+            <a:r>
+              <a:rPr lang="zh-CN" dirty="0"/>
+              <a:t>第 88 节 · 核心知识点：API 概念与 Requests</a:t>
+            </a:r>
+          </a:p>
+          <a:p>
+            <a:r>
+              <a:rPr lang="zh-CN" dirty="0"/>
+              <a:t/>
+            </a:r>
+          </a:p>
+          <a:p>
+            <a:r>
+              <a:rPr lang="zh-CN" dirty="0"/>
+              <a:t>讲这一页时：先让学生说出上节课的结论，再逐块讲要点。</a:t>
+            </a:r>
+          </a:p>
+          <a:p>
+            <a:r>
+              <a:rPr lang="zh-CN" dirty="0"/>
+              <a:t>每讲完一块，问一句「这一步如果写错了，报错会长什么样？」——把错误提前讲。</a:t>
+            </a:r>
+          </a:p>
+          <a:p>
+            <a:r>
+              <a:rPr lang="zh-CN" dirty="0"/>
+              <a:t/>
+            </a:r>
+          </a:p>
+          <a:p>
+            <a:r>
+              <a:rPr lang="zh-CN" dirty="0"/>
+              <a:t>本节目标：理解 API 是什么；会用 requests.get 并检查 status_code、用 .json() 拿字典</a:t>
+            </a:r>
+          </a:p>
+          <a:p>
+            <a:r>
+              <a:rPr lang="zh-CN" dirty="0"/>
+              <a:t/>
+            </a:r>
+          </a:p>
+          <a:p>
+            <a:r>
+              <a:rPr lang="zh-CN" dirty="0"/>
+              <a:t>看不到懂的地方，回讲义对应小节读一遍，再回来对着这页复述一次——能讲出来才算真懂。</a:t>
+            </a:r>
+          </a:p>
+        </p:txBody>
+      </p:sp>
     </p:spTree>
   </p:cSld>
   <p:clrMapOvr>
@@ -735,6 +1019,104 @@
           </a:p>
         </p:txBody>
       </p:sp>
+      <p:sp>
+        <p:nvSpPr>
+          <p:cNvPr id="2" name="讲课提示"/>
+          <p:cNvSpPr txBox="1"/>
+          <p:nvPr/>
+        </p:nvSpPr>
+        <p:spPr>
+          <a:xfrm>
+            <a:off x="457200" y="457200"/>
+            <a:ext cx="6858000" cy="4800600"/>
+          </a:xfrm>
+          <a:prstGeom prst="rect">
+            <a:avLst/>
+          </a:prstGeom>
+        </p:spPr>
+        <p:txBody>
+          <a:bodyPr wrap="square"/>
+          <a:lstStyle/>
+          <a:p>
+            <a:r>
+              <a:rPr lang="zh-CN" dirty="0"/>
+              <a:t>第 89 节 · GitHub API 与速率限制</a:t>
+            </a:r>
+          </a:p>
+          <a:p>
+            <a:r>
+              <a:rPr lang="zh-CN" dirty="0"/>
+              <a:t>单元 17 · 使用 API 与 Plotly · W21–W22</a:t>
+            </a:r>
+          </a:p>
+          <a:p>
+            <a:r>
+              <a:rPr lang="zh-CN" dirty="0"/>
+              <a:t/>
+            </a:r>
+          </a:p>
+          <a:p>
+            <a:r>
+              <a:rPr lang="zh-CN" dirty="0"/>
+              <a:t>学习目标：会调 GitHub search API 提取仓库信息；知道未认证每小时 60 次的限制</a:t>
+            </a:r>
+          </a:p>
+          <a:p>
+            <a:r>
+              <a:rPr lang="zh-CN" dirty="0"/>
+              <a:t/>
+            </a:r>
+          </a:p>
+          <a:p>
+            <a:r>
+              <a:rPr lang="zh-CN" dirty="0"/>
+              <a:t>课堂实操（40 分钟，不看答案）：</a:t>
+            </a:r>
+          </a:p>
+          <a:p>
+            <a:r>
+              <a:rPr lang="zh-CN" dirty="0"/>
+              <a:t>· 提取前 5 个热门仓库的 name / stars / url</a:t>
+            </a:r>
+          </a:p>
+          <a:p>
+            <a:r>
+              <a:rPr lang="zh-CN" dirty="0"/>
+              <a:t>· 打印 X-RateLimit-Remaining 看剩余次数</a:t>
+            </a:r>
+          </a:p>
+          <a:p>
+            <a:r>
+              <a:rPr lang="zh-CN" dirty="0"/>
+              <a:t/>
+            </a:r>
+          </a:p>
+          <a:p>
+            <a:r>
+              <a:rPr lang="zh-CN" dirty="0"/>
+              <a:t>课后作业：</a:t>
+            </a:r>
+          </a:p>
+          <a:p>
+            <a:r>
+              <a:rPr lang="zh-CN" dirty="0"/>
+              <a:t>· ★ 给自己常看的语言拉一份 TOP 20 仓库</a:t>
+            </a:r>
+          </a:p>
+          <a:p>
+            <a:r>
+              <a:rPr lang="zh-CN" dirty="0"/>
+              <a:t/>
+            </a:r>
+          </a:p>
+          <a:p>
+            <a:r>
+              <a:rPr lang="zh-CN" dirty="0"/>
+              <a:t>节奏：讲 20 分钟 → 学员自己敲 40 分钟（不看答案）→ 对讲评自查 20 分钟 → 写作业 10 分钟。</a:t>
+            </a:r>
+          </a:p>
+        </p:txBody>
+      </p:sp>
     </p:spTree>
   </p:cSld>
   <p:clrMapOvr>
@@ -828,6 +1210,74 @@
           </a:p>
         </p:txBody>
       </p:sp>
+      <p:sp>
+        <p:nvSpPr>
+          <p:cNvPr id="2" name="讲课提示"/>
+          <p:cNvSpPr txBox="1"/>
+          <p:nvPr/>
+        </p:nvSpPr>
+        <p:spPr>
+          <a:xfrm>
+            <a:off x="457200" y="457200"/>
+            <a:ext cx="6858000" cy="4800600"/>
+          </a:xfrm>
+          <a:prstGeom prst="rect">
+            <a:avLst/>
+          </a:prstGeom>
+        </p:spPr>
+        <p:txBody>
+          <a:bodyPr wrap="square"/>
+          <a:lstStyle/>
+          <a:p>
+            <a:r>
+              <a:rPr lang="zh-CN" dirty="0"/>
+              <a:t>第 89 节 · 核心知识点：GitHub API 与速率限制</a:t>
+            </a:r>
+          </a:p>
+          <a:p>
+            <a:r>
+              <a:rPr lang="zh-CN" dirty="0"/>
+              <a:t/>
+            </a:r>
+          </a:p>
+          <a:p>
+            <a:r>
+              <a:rPr lang="zh-CN" dirty="0"/>
+              <a:t>讲这一页时：先让学生说出上节课的结论，再逐块讲要点。</a:t>
+            </a:r>
+          </a:p>
+          <a:p>
+            <a:r>
+              <a:rPr lang="zh-CN" dirty="0"/>
+              <a:t>每讲完一块，问一句「这一步如果写错了，报错会长什么样？」——把错误提前讲。</a:t>
+            </a:r>
+          </a:p>
+          <a:p>
+            <a:r>
+              <a:rPr lang="zh-CN" dirty="0"/>
+              <a:t/>
+            </a:r>
+          </a:p>
+          <a:p>
+            <a:r>
+              <a:rPr lang="zh-CN" dirty="0"/>
+              <a:t>本节目标：会调 GitHub search API 提取仓库信息；知道未认证每小时 60 次的限制</a:t>
+            </a:r>
+          </a:p>
+          <a:p>
+            <a:r>
+              <a:rPr lang="zh-CN" dirty="0"/>
+              <a:t/>
+            </a:r>
+          </a:p>
+          <a:p>
+            <a:r>
+              <a:rPr lang="zh-CN" dirty="0"/>
+              <a:t>看不到懂的地方，回讲义对应小节读一遍，再回来对着这页复述一次——能讲出来才算真懂。</a:t>
+            </a:r>
+          </a:p>
+        </p:txBody>
+      </p:sp>
     </p:spTree>
   </p:cSld>
   <p:clrMapOvr>
@@ -951,6 +1401,104 @@
           </a:p>
         </p:txBody>
       </p:sp>
+      <p:sp>
+        <p:nvSpPr>
+          <p:cNvPr id="2" name="讲课提示"/>
+          <p:cNvSpPr txBox="1"/>
+          <p:nvPr/>
+        </p:nvSpPr>
+        <p:spPr>
+          <a:xfrm>
+            <a:off x="457200" y="457200"/>
+            <a:ext cx="6858000" cy="4800600"/>
+          </a:xfrm>
+          <a:prstGeom prst="rect">
+            <a:avLst/>
+          </a:prstGeom>
+        </p:spPr>
+        <p:txBody>
+          <a:bodyPr wrap="square"/>
+          <a:lstStyle/>
+          <a:p>
+            <a:r>
+              <a:rPr lang="zh-CN" dirty="0"/>
+              <a:t>第 90 节 · Plotly 可视化与可点击链接</a:t>
+            </a:r>
+          </a:p>
+          <a:p>
+            <a:r>
+              <a:rPr lang="zh-CN" dirty="0"/>
+              <a:t>单元 17 · 使用 API 与 Plotly · W22</a:t>
+            </a:r>
+          </a:p>
+          <a:p>
+            <a:r>
+              <a:rPr lang="zh-CN" dirty="0"/>
+              <a:t/>
+            </a:r>
+          </a:p>
+          <a:p>
+            <a:r>
+              <a:rPr lang="zh-CN" dirty="0"/>
+              <a:t>学习目标：会用 px.bar 可视化；会用 customdata + hovertemplate 做可点击链接</a:t>
+            </a:r>
+          </a:p>
+          <a:p>
+            <a:r>
+              <a:rPr lang="zh-CN" dirty="0"/>
+              <a:t/>
+            </a:r>
+          </a:p>
+          <a:p>
+            <a:r>
+              <a:rPr lang="zh-CN" dirty="0"/>
+              <a:t>课堂实操（40 分钟，不看答案）：</a:t>
+            </a:r>
+          </a:p>
+          <a:p>
+            <a:r>
+              <a:rPr lang="zh-CN" dirty="0"/>
+              <a:t>· 画出仓库条形图并加悬停内容</a:t>
+            </a:r>
+          </a:p>
+          <a:p>
+            <a:r>
+              <a:rPr lang="zh-CN" dirty="0"/>
+              <a:t>· 让图表里的仓库名能点击跳转</a:t>
+            </a:r>
+          </a:p>
+          <a:p>
+            <a:r>
+              <a:rPr lang="zh-CN" dirty="0"/>
+              <a:t/>
+            </a:r>
+          </a:p>
+          <a:p>
+            <a:r>
+              <a:rPr lang="zh-CN" dirty="0"/>
+              <a:t>课后作业：</a:t>
+            </a:r>
+          </a:p>
+          <a:p>
+            <a:r>
+              <a:rPr lang="zh-CN" dirty="0"/>
+              <a:t>· 完成教材 17.2 全部动手练</a:t>
+            </a:r>
+          </a:p>
+          <a:p>
+            <a:r>
+              <a:rPr lang="zh-CN" dirty="0"/>
+              <a:t/>
+            </a:r>
+          </a:p>
+          <a:p>
+            <a:r>
+              <a:rPr lang="zh-CN" dirty="0"/>
+              <a:t>节奏：讲 20 分钟 → 学员自己敲 40 分钟（不看答案）→ 对讲评自查 20 分钟 → 写作业 10 分钟。</a:t>
+            </a:r>
+          </a:p>
+        </p:txBody>
+      </p:sp>
     </p:spTree>
   </p:cSld>
   <p:clrMapOvr>
@@ -1044,6 +1592,74 @@
           </a:p>
         </p:txBody>
       </p:sp>
+      <p:sp>
+        <p:nvSpPr>
+          <p:cNvPr id="2" name="讲课提示"/>
+          <p:cNvSpPr txBox="1"/>
+          <p:nvPr/>
+        </p:nvSpPr>
+        <p:spPr>
+          <a:xfrm>
+            <a:off x="457200" y="457200"/>
+            <a:ext cx="6858000" cy="4800600"/>
+          </a:xfrm>
+          <a:prstGeom prst="rect">
+            <a:avLst/>
+          </a:prstGeom>
+        </p:spPr>
+        <p:txBody>
+          <a:bodyPr wrap="square"/>
+          <a:lstStyle/>
+          <a:p>
+            <a:r>
+              <a:rPr lang="zh-CN" dirty="0"/>
+              <a:t>第 90 节 · 核心知识点：Plotly 可视化与可点击链接</a:t>
+            </a:r>
+          </a:p>
+          <a:p>
+            <a:r>
+              <a:rPr lang="zh-CN" dirty="0"/>
+              <a:t/>
+            </a:r>
+          </a:p>
+          <a:p>
+            <a:r>
+              <a:rPr lang="zh-CN" dirty="0"/>
+              <a:t>讲这一页时：先让学生说出上节课的结论，再逐块讲要点。</a:t>
+            </a:r>
+          </a:p>
+          <a:p>
+            <a:r>
+              <a:rPr lang="zh-CN" dirty="0"/>
+              <a:t>每讲完一块，问一句「这一步如果写错了，报错会长什么样？」——把错误提前讲。</a:t>
+            </a:r>
+          </a:p>
+          <a:p>
+            <a:r>
+              <a:rPr lang="zh-CN" dirty="0"/>
+              <a:t/>
+            </a:r>
+          </a:p>
+          <a:p>
+            <a:r>
+              <a:rPr lang="zh-CN" dirty="0"/>
+              <a:t>本节目标：会用 px.bar 可视化；会用 customdata + hovertemplate 做可点击链接</a:t>
+            </a:r>
+          </a:p>
+          <a:p>
+            <a:r>
+              <a:rPr lang="zh-CN" dirty="0"/>
+              <a:t/>
+            </a:r>
+          </a:p>
+          <a:p>
+            <a:r>
+              <a:rPr lang="zh-CN" dirty="0"/>
+              <a:t>看不到懂的地方，回讲义对应小节读一遍，再回来对着这页复述一次——能讲出来才算真懂。</a:t>
+            </a:r>
+          </a:p>
+        </p:txBody>
+      </p:sp>
     </p:spTree>
   </p:cSld>
   <p:clrMapOvr>
@@ -1167,6 +1783,104 @@
           </a:p>
         </p:txBody>
       </p:sp>
+      <p:sp>
+        <p:nvSpPr>
+          <p:cNvPr id="2" name="讲课提示"/>
+          <p:cNvSpPr txBox="1"/>
+          <p:nvPr/>
+        </p:nvSpPr>
+        <p:spPr>
+          <a:xfrm>
+            <a:off x="457200" y="457200"/>
+            <a:ext cx="6858000" cy="4800600"/>
+          </a:xfrm>
+          <a:prstGeom prst="rect">
+            <a:avLst/>
+          </a:prstGeom>
+        </p:spPr>
+        <p:txBody>
+          <a:bodyPr wrap="square"/>
+          <a:lstStyle/>
+          <a:p>
+            <a:r>
+              <a:rPr lang="zh-CN" dirty="0"/>
+              <a:t>第 91 节 · Hacker News API 与动手实战</a:t>
+            </a:r>
+          </a:p>
+          <a:p>
+            <a:r>
+              <a:rPr lang="zh-CN" dirty="0"/>
+              <a:t>单元 17 · 使用 API 与 Plotly · W22</a:t>
+            </a:r>
+          </a:p>
+          <a:p>
+            <a:r>
+              <a:rPr lang="zh-CN" dirty="0"/>
+              <a:t/>
+            </a:r>
+          </a:p>
+          <a:p>
+            <a:r>
+              <a:rPr lang="zh-CN" dirty="0"/>
+              <a:t>学习目标：掌握「先拿列表再取详情」的两段式调用；给 API 调用加容错</a:t>
+            </a:r>
+          </a:p>
+          <a:p>
+            <a:r>
+              <a:rPr lang="zh-CN" dirty="0"/>
+              <a:t/>
+            </a:r>
+          </a:p>
+          <a:p>
+            <a:r>
+              <a:rPr lang="zh-CN" dirty="0"/>
+              <a:t>课堂实操（40 分钟，不看答案）：</a:t>
+            </a:r>
+          </a:p>
+          <a:p>
+            <a:r>
+              <a:rPr lang="zh-CN" dirty="0"/>
+              <a:t>· 实现 Hacker News 抓取</a:t>
+            </a:r>
+          </a:p>
+          <a:p>
+            <a:r>
+              <a:rPr lang="zh-CN" dirty="0"/>
+              <a:t>· 故意让某个 id 请求失败，看程序会不会崩</a:t>
+            </a:r>
+          </a:p>
+          <a:p>
+            <a:r>
+              <a:rPr lang="zh-CN" dirty="0"/>
+              <a:t/>
+            </a:r>
+          </a:p>
+          <a:p>
+            <a:r>
+              <a:rPr lang="zh-CN" dirty="0"/>
+              <a:t>课后作业：</a:t>
+            </a:r>
+          </a:p>
+          <a:p>
+            <a:r>
+              <a:rPr lang="zh-CN" dirty="0"/>
+              <a:t>· ★ 产出：能拉 GitHub 数据并出交互图的脚本</a:t>
+            </a:r>
+          </a:p>
+          <a:p>
+            <a:r>
+              <a:rPr lang="zh-CN" dirty="0"/>
+              <a:t/>
+            </a:r>
+          </a:p>
+          <a:p>
+            <a:r>
+              <a:rPr lang="zh-CN" dirty="0"/>
+              <a:t>节奏：讲 20 分钟 → 学员自己敲 40 分钟（不看答案）→ 对讲评自查 20 分钟 → 写作业 10 分钟。</a:t>
+            </a:r>
+          </a:p>
+        </p:txBody>
+      </p:sp>
     </p:spTree>
   </p:cSld>
   <p:clrMapOvr>
@@ -1192,6 +1906,74 @@
           <a:chExt cx="0" cy="0"/>
         </a:xfrm>
       </p:grpSpPr>
+      <p:sp>
+        <p:nvSpPr>
+          <p:cNvPr id="2" name="讲课提示"/>
+          <p:cNvSpPr txBox="1"/>
+          <p:nvPr/>
+        </p:nvSpPr>
+        <p:spPr>
+          <a:xfrm>
+            <a:off x="457200" y="457200"/>
+            <a:ext cx="6858000" cy="4800600"/>
+          </a:xfrm>
+          <a:prstGeom prst="rect">
+            <a:avLst/>
+          </a:prstGeom>
+        </p:spPr>
+        <p:txBody>
+          <a:bodyPr wrap="square"/>
+          <a:lstStyle/>
+          <a:p>
+            <a:r>
+              <a:rPr lang="zh-CN" dirty="0"/>
+              <a:t>第 91 节 · 核心知识点：Hacker News API 与动手实战</a:t>
+            </a:r>
+          </a:p>
+          <a:p>
+            <a:r>
+              <a:rPr lang="zh-CN" dirty="0"/>
+              <a:t/>
+            </a:r>
+          </a:p>
+          <a:p>
+            <a:r>
+              <a:rPr lang="zh-CN" dirty="0"/>
+              <a:t>讲这一页时：先让学生说出上节课的结论，再逐块讲要点。</a:t>
+            </a:r>
+          </a:p>
+          <a:p>
+            <a:r>
+              <a:rPr lang="zh-CN" dirty="0"/>
+              <a:t>每讲完一块，问一句「这一步如果写错了，报错会长什么样？」——把错误提前讲。</a:t>
+            </a:r>
+          </a:p>
+          <a:p>
+            <a:r>
+              <a:rPr lang="zh-CN" dirty="0"/>
+              <a:t/>
+            </a:r>
+          </a:p>
+          <a:p>
+            <a:r>
+              <a:rPr lang="zh-CN" dirty="0"/>
+              <a:t>本节目标：掌握「先拿列表再取详情」的两段式调用；给 API 调用加容错</a:t>
+            </a:r>
+          </a:p>
+          <a:p>
+            <a:r>
+              <a:rPr lang="zh-CN" dirty="0"/>
+              <a:t/>
+            </a:r>
+          </a:p>
+          <a:p>
+            <a:r>
+              <a:rPr lang="zh-CN" dirty="0"/>
+              <a:t>看不到懂的地方，回讲义对应小节读一遍，再回来对着这页复述一次——能讲出来才算真懂。</a:t>
+            </a:r>
+          </a:p>
+        </p:txBody>
+      </p:sp>
       <p:sp>
         <p:nvSpPr>
           <p:cNvPr id="2" name="讲课提示"/>

--- a/python-course-ppt/逐节课件/Python讲授课件-单元17.pptx
+++ b/python-course-ppt/逐节课件/Python讲授课件-单元17.pptx
@@ -236,1820 +236,6 @@
 </p:notesMaster>
 </file>
 
-<file path=ppt/notesSlides/notesSlide1.xml><?xml version="1.0" encoding="utf-8"?>
-<p:notes xmlns:a="http://schemas.openxmlformats.org/drawingml/2006/main" xmlns:p="http://schemas.openxmlformats.org/presentationml/2006/main" xmlns:r="http://schemas.openxmlformats.org/officeDocument/2006/relationships">
-  <p:cSld>
-    <p:spTree>
-      <p:nvGrpSpPr>
-        <p:cNvPr id="1" name=""/>
-        <p:cNvGrpSpPr/>
-        <p:nvPr/>
-      </p:nvGrpSpPr>
-      <p:grpSpPr>
-        <a:xfrm>
-          <a:off x="0" y="0"/>
-          <a:ext cx="0" cy="0"/>
-          <a:chOff x="0" y="0"/>
-          <a:chExt cx="0" cy="0"/>
-        </a:xfrm>
-      </p:grpSpPr>
-      <p:sp>
-        <p:nvSpPr>
-          <p:cNvPr id="2" name="讲课提示"/>
-          <p:cNvSpPr txBox="1"/>
-          <p:nvPr/>
-        </p:nvSpPr>
-        <p:spPr>
-          <a:xfrm>
-            <a:off x="457200" y="457200"/>
-            <a:ext cx="6858000" cy="4800600"/>
-          </a:xfrm>
-          <a:prstGeom prst="rect">
-            <a:avLst/>
-          </a:prstGeom>
-        </p:spPr>
-        <p:txBody>
-          <a:bodyPr wrap="square"/>
-          <a:lstStyle/>
-          <a:p>
-            <a:r>
-              <a:rPr lang="zh-CN" dirty="0"/>
-              <a:t>单元 17 · 单元 17 · 使用 API 与 Plotly</a:t>
-            </a:r>
-          </a:p>
-          <a:p>
-            <a:r>
-              <a:rPr lang="zh-CN" dirty="0"/>
-              <a:t/>
-            </a:r>
-          </a:p>
-          <a:p>
-            <a:r>
-              <a:rPr lang="zh-CN" dirty="0"/>
-              <a:t>本单元包含以下课节：</a:t>
-            </a:r>
-          </a:p>
-          <a:p>
-            <a:r>
-              <a:rPr lang="zh-CN" dirty="0"/>
-              <a:t>· 第 88 节 API 概念与 Requests</a:t>
-            </a:r>
-          </a:p>
-          <a:p>
-            <a:r>
-              <a:rPr lang="zh-CN" dirty="0"/>
-              <a:t>· 第 89 节 GitHub API 与速率限制</a:t>
-            </a:r>
-          </a:p>
-          <a:p>
-            <a:r>
-              <a:rPr lang="zh-CN" dirty="0"/>
-              <a:t>· 第 90 节 Plotly 可视化与可点击链接</a:t>
-            </a:r>
-          </a:p>
-          <a:p>
-            <a:r>
-              <a:rPr lang="zh-CN" dirty="0"/>
-              <a:t>· 第 91 节 Hacker News API 与动手实战</a:t>
-            </a:r>
-          </a:p>
-          <a:p>
-            <a:r>
-              <a:rPr lang="zh-CN" dirty="0"/>
-              <a:t/>
-            </a:r>
-          </a:p>
-          <a:p>
-            <a:r>
-              <a:rPr lang="zh-CN" dirty="0"/>
-              <a:t>开场用 3 分钟讲清：这个单元学完能做出什么，最后会被关卡怎么验。</a:t>
-            </a:r>
-          </a:p>
-        </p:txBody>
-      </p:sp>
-      <p:sp>
-        <p:nvSpPr>
-          <p:cNvPr id="2" name="讲课提示"/>
-          <p:cNvSpPr txBox="1"/>
-          <p:nvPr/>
-        </p:nvSpPr>
-        <p:spPr>
-          <a:xfrm>
-            <a:off x="457200" y="457200"/>
-            <a:ext cx="6858000" cy="4800600"/>
-          </a:xfrm>
-          <a:prstGeom prst="rect">
-            <a:avLst/>
-          </a:prstGeom>
-        </p:spPr>
-        <p:txBody>
-          <a:bodyPr wrap="square"/>
-          <a:lstStyle/>
-          <a:p>
-            <a:r>
-              <a:rPr lang="zh-CN" dirty="0"/>
-              <a:t>单元 17 · 单元 17 · 使用 API 与 Plotly</a:t>
-            </a:r>
-          </a:p>
-          <a:p>
-            <a:r>
-              <a:rPr lang="zh-CN" dirty="0"/>
-              <a:t/>
-            </a:r>
-          </a:p>
-          <a:p>
-            <a:r>
-              <a:rPr lang="zh-CN" dirty="0"/>
-              <a:t>本单元包含以下课节：</a:t>
-            </a:r>
-          </a:p>
-          <a:p>
-            <a:r>
-              <a:rPr lang="zh-CN" dirty="0"/>
-              <a:t>· 第 88 节 API 概念与 Requests</a:t>
-            </a:r>
-          </a:p>
-          <a:p>
-            <a:r>
-              <a:rPr lang="zh-CN" dirty="0"/>
-              <a:t>· 第 89 节 GitHub API 与速率限制</a:t>
-            </a:r>
-          </a:p>
-          <a:p>
-            <a:r>
-              <a:rPr lang="zh-CN" dirty="0"/>
-              <a:t>· 第 90 节 Plotly 可视化与可点击链接</a:t>
-            </a:r>
-          </a:p>
-          <a:p>
-            <a:r>
-              <a:rPr lang="zh-CN" dirty="0"/>
-              <a:t>· 第 91 节 Hacker News API 与动手实战</a:t>
-            </a:r>
-          </a:p>
-          <a:p>
-            <a:r>
-              <a:rPr lang="zh-CN" dirty="0"/>
-              <a:t/>
-            </a:r>
-          </a:p>
-          <a:p>
-            <a:r>
-              <a:rPr lang="zh-CN" dirty="0"/>
-              <a:t>开场用 3 分钟讲清：这个单元学完能做出什么，最后会被关卡怎么验。</a:t>
-            </a:r>
-          </a:p>
-        </p:txBody>
-      </p:sp>
-    </p:spTree>
-  </p:cSld>
-  <p:clrMapOvr>
-    <a:masterClrMapping/>
-  </p:clrMapOvr>
-</p:notes>
-</file>
-
-<file path=ppt/notesSlides/notesSlide10.xml><?xml version="1.0" encoding="utf-8"?>
-<p:notes xmlns:a="http://schemas.openxmlformats.org/drawingml/2006/main" xmlns:p="http://schemas.openxmlformats.org/presentationml/2006/main" xmlns:r="http://schemas.openxmlformats.org/officeDocument/2006/relationships">
-  <p:cSld>
-    <p:spTree>
-      <p:nvGrpSpPr>
-        <p:cNvPr id="1" name=""/>
-        <p:cNvGrpSpPr/>
-        <p:nvPr/>
-      </p:nvGrpSpPr>
-      <p:grpSpPr>
-        <a:xfrm>
-          <a:off x="0" y="0"/>
-          <a:ext cx="0" cy="0"/>
-          <a:chOff x="0" y="0"/>
-          <a:chExt cx="0" cy="0"/>
-        </a:xfrm>
-      </p:grpSpPr>
-      <p:sp>
-        <p:nvSpPr>
-          <p:cNvPr id="2" name="讲课提示"/>
-          <p:cNvSpPr txBox="1"/>
-          <p:nvPr/>
-        </p:nvSpPr>
-        <p:spPr>
-          <a:xfrm>
-            <a:off x="457200" y="457200"/>
-            <a:ext cx="6858000" cy="4800600"/>
-          </a:xfrm>
-          <a:prstGeom prst="rect">
-            <a:avLst/>
-          </a:prstGeom>
-        </p:spPr>
-        <p:txBody>
-          <a:bodyPr wrap="square"/>
-          <a:lstStyle/>
-          <a:p>
-            <a:r>
-              <a:rPr lang="zh-CN" dirty="0"/>
-              <a:t>单元 17 小结 · 单元 17 · 小结</a:t>
-            </a:r>
-          </a:p>
-          <a:p>
-            <a:r>
-              <a:rPr lang="zh-CN" dirty="0"/>
-              <a:t/>
-            </a:r>
-          </a:p>
-          <a:p>
-            <a:r>
-              <a:rPr lang="zh-CN" dirty="0"/>
-              <a:t>收尾动作：让学生合上讲义，口述本单元三个最重要的结论；说不出来的，回对应课节。</a:t>
-            </a:r>
-          </a:p>
-          <a:p>
-            <a:r>
-              <a:rPr lang="zh-CN" dirty="0"/>
-              <a:t>然后当场勾一遍本单元课节的「已完成」，没打勾的进下一单元前补掉。</a:t>
-            </a:r>
-          </a:p>
-        </p:txBody>
-      </p:sp>
-      <p:sp>
-        <p:nvSpPr>
-          <p:cNvPr id="2" name="讲课提示"/>
-          <p:cNvSpPr txBox="1"/>
-          <p:nvPr/>
-        </p:nvSpPr>
-        <p:spPr>
-          <a:xfrm>
-            <a:off x="457200" y="457200"/>
-            <a:ext cx="6858000" cy="4800600"/>
-          </a:xfrm>
-          <a:prstGeom prst="rect">
-            <a:avLst/>
-          </a:prstGeom>
-        </p:spPr>
-        <p:txBody>
-          <a:bodyPr wrap="square"/>
-          <a:lstStyle/>
-          <a:p>
-            <a:r>
-              <a:rPr lang="zh-CN" dirty="0"/>
-              <a:t>单元 17 小结 · 单元 17 · 小结</a:t>
-            </a:r>
-          </a:p>
-          <a:p>
-            <a:r>
-              <a:rPr lang="zh-CN" dirty="0"/>
-              <a:t/>
-            </a:r>
-          </a:p>
-          <a:p>
-            <a:r>
-              <a:rPr lang="zh-CN" dirty="0"/>
-              <a:t>收尾动作：让学生合上讲义，口述本单元三个最重要的结论；说不出来的，回对应课节。</a:t>
-            </a:r>
-          </a:p>
-          <a:p>
-            <a:r>
-              <a:rPr lang="zh-CN" dirty="0"/>
-              <a:t>然后当场勾一遍本单元课节的「已完成」，没打勾的进下一单元前补掉。</a:t>
-            </a:r>
-          </a:p>
-        </p:txBody>
-      </p:sp>
-    </p:spTree>
-  </p:cSld>
-  <p:clrMapOvr>
-    <a:masterClrMapping/>
-  </p:clrMapOvr>
-</p:notes>
-</file>
-
-<file path=ppt/notesSlides/notesSlide2.xml><?xml version="1.0" encoding="utf-8"?>
-<p:notes xmlns:a="http://schemas.openxmlformats.org/drawingml/2006/main" xmlns:p="http://schemas.openxmlformats.org/presentationml/2006/main" xmlns:r="http://schemas.openxmlformats.org/officeDocument/2006/relationships">
-  <p:cSld>
-    <p:spTree>
-      <p:nvGrpSpPr>
-        <p:cNvPr id="1" name=""/>
-        <p:cNvGrpSpPr/>
-        <p:nvPr/>
-      </p:nvGrpSpPr>
-      <p:grpSpPr>
-        <a:xfrm>
-          <a:off x="0" y="0"/>
-          <a:ext cx="0" cy="0"/>
-          <a:chOff x="0" y="0"/>
-          <a:chExt cx="0" cy="0"/>
-        </a:xfrm>
-      </p:grpSpPr>
-      <p:sp>
-        <p:nvSpPr>
-          <p:cNvPr id="2" name="讲课提示"/>
-          <p:cNvSpPr txBox="1"/>
-          <p:nvPr/>
-        </p:nvSpPr>
-        <p:spPr>
-          <a:xfrm>
-            <a:off x="457200" y="457200"/>
-            <a:ext cx="6858000" cy="4800600"/>
-          </a:xfrm>
-          <a:prstGeom prst="rect">
-            <a:avLst/>
-          </a:prstGeom>
-        </p:spPr>
-        <p:txBody>
-          <a:bodyPr wrap="square"/>
-          <a:lstStyle/>
-          <a:p>
-            <a:r>
-              <a:rPr lang="zh-CN" dirty="0"/>
-              <a:t>第 88 节 · API 概念与 Requests</a:t>
-            </a:r>
-          </a:p>
-          <a:p>
-            <a:r>
-              <a:rPr lang="zh-CN" dirty="0"/>
-              <a:t>单元 17 · 使用 API 与 Plotly · W21</a:t>
-            </a:r>
-          </a:p>
-          <a:p>
-            <a:r>
-              <a:rPr lang="zh-CN" dirty="0"/>
-              <a:t/>
-            </a:r>
-          </a:p>
-          <a:p>
-            <a:r>
-              <a:rPr lang="zh-CN" dirty="0"/>
-              <a:t>学习目标：理解 API 是什么；会用 requests.get 并检查 status_code、用 .json() 拿字典</a:t>
-            </a:r>
-          </a:p>
-          <a:p>
-            <a:r>
-              <a:rPr lang="zh-CN" dirty="0"/>
-              <a:t/>
-            </a:r>
-          </a:p>
-          <a:p>
-            <a:r>
-              <a:rPr lang="zh-CN" dirty="0"/>
-              <a:t>课堂实操（40 分钟，不看答案）：</a:t>
-            </a:r>
-          </a:p>
-          <a:p>
-            <a:r>
-              <a:rPr lang="zh-CN" dirty="0"/>
-              <a:t>· 发一次请求并打印 status_code 与响应前 200 字符</a:t>
-            </a:r>
-          </a:p>
-          <a:p>
-            <a:r>
-              <a:rPr lang="zh-CN" dirty="0"/>
-              <a:t>· 故意请求一个不存在的 URL 看 404</a:t>
-            </a:r>
-          </a:p>
-          <a:p>
-            <a:r>
-              <a:rPr lang="zh-CN" dirty="0"/>
-              <a:t/>
-            </a:r>
-          </a:p>
-          <a:p>
-            <a:r>
-              <a:rPr lang="zh-CN" dirty="0"/>
-              <a:t>课后作业：</a:t>
-            </a:r>
-          </a:p>
-          <a:p>
-            <a:r>
-              <a:rPr lang="zh-CN" dirty="0"/>
-              <a:t>· 装好 requests 并跑通第一个 API 调用</a:t>
-            </a:r>
-          </a:p>
-          <a:p>
-            <a:r>
-              <a:rPr lang="zh-CN" dirty="0"/>
-              <a:t/>
-            </a:r>
-          </a:p>
-          <a:p>
-            <a:r>
-              <a:rPr lang="zh-CN" dirty="0"/>
-              <a:t>节奏：讲 20 分钟 → 学员自己敲 40 分钟（不看答案）→ 对讲评自查 20 分钟 → 写作业 10 分钟。</a:t>
-            </a:r>
-          </a:p>
-        </p:txBody>
-      </p:sp>
-      <p:sp>
-        <p:nvSpPr>
-          <p:cNvPr id="2" name="讲课提示"/>
-          <p:cNvSpPr txBox="1"/>
-          <p:nvPr/>
-        </p:nvSpPr>
-        <p:spPr>
-          <a:xfrm>
-            <a:off x="457200" y="457200"/>
-            <a:ext cx="6858000" cy="4800600"/>
-          </a:xfrm>
-          <a:prstGeom prst="rect">
-            <a:avLst/>
-          </a:prstGeom>
-        </p:spPr>
-        <p:txBody>
-          <a:bodyPr wrap="square"/>
-          <a:lstStyle/>
-          <a:p>
-            <a:r>
-              <a:rPr lang="zh-CN" dirty="0"/>
-              <a:t>第 88 节 · API 概念与 Requests</a:t>
-            </a:r>
-          </a:p>
-          <a:p>
-            <a:r>
-              <a:rPr lang="zh-CN" dirty="0"/>
-              <a:t>单元 17 · 使用 API 与 Plotly · W21</a:t>
-            </a:r>
-          </a:p>
-          <a:p>
-            <a:r>
-              <a:rPr lang="zh-CN" dirty="0"/>
-              <a:t/>
-            </a:r>
-          </a:p>
-          <a:p>
-            <a:r>
-              <a:rPr lang="zh-CN" dirty="0"/>
-              <a:t>学习目标：理解 API 是什么；会用 requests.get 并检查 status_code、用 .json() 拿字典</a:t>
-            </a:r>
-          </a:p>
-          <a:p>
-            <a:r>
-              <a:rPr lang="zh-CN" dirty="0"/>
-              <a:t/>
-            </a:r>
-          </a:p>
-          <a:p>
-            <a:r>
-              <a:rPr lang="zh-CN" dirty="0"/>
-              <a:t>课堂实操（40 分钟，不看答案）：</a:t>
-            </a:r>
-          </a:p>
-          <a:p>
-            <a:r>
-              <a:rPr lang="zh-CN" dirty="0"/>
-              <a:t>· 发一次请求并打印 status_code 与响应前 200 字符</a:t>
-            </a:r>
-          </a:p>
-          <a:p>
-            <a:r>
-              <a:rPr lang="zh-CN" dirty="0"/>
-              <a:t>· 故意请求一个不存在的 URL 看 404</a:t>
-            </a:r>
-          </a:p>
-          <a:p>
-            <a:r>
-              <a:rPr lang="zh-CN" dirty="0"/>
-              <a:t/>
-            </a:r>
-          </a:p>
-          <a:p>
-            <a:r>
-              <a:rPr lang="zh-CN" dirty="0"/>
-              <a:t>课后作业：</a:t>
-            </a:r>
-          </a:p>
-          <a:p>
-            <a:r>
-              <a:rPr lang="zh-CN" dirty="0"/>
-              <a:t>· 装好 requests 并跑通第一个 API 调用</a:t>
-            </a:r>
-          </a:p>
-          <a:p>
-            <a:r>
-              <a:rPr lang="zh-CN" dirty="0"/>
-              <a:t/>
-            </a:r>
-          </a:p>
-          <a:p>
-            <a:r>
-              <a:rPr lang="zh-CN" dirty="0"/>
-              <a:t>节奏：讲 20 分钟 → 学员自己敲 40 分钟（不看答案）→ 对讲评自查 20 分钟 → 写作业 10 分钟。</a:t>
-            </a:r>
-          </a:p>
-        </p:txBody>
-      </p:sp>
-    </p:spTree>
-  </p:cSld>
-  <p:clrMapOvr>
-    <a:masterClrMapping/>
-  </p:clrMapOvr>
-</p:notes>
-</file>
-
-<file path=ppt/notesSlides/notesSlide3.xml><?xml version="1.0" encoding="utf-8"?>
-<p:notes xmlns:a="http://schemas.openxmlformats.org/drawingml/2006/main" xmlns:p="http://schemas.openxmlformats.org/presentationml/2006/main" xmlns:r="http://schemas.openxmlformats.org/officeDocument/2006/relationships">
-  <p:cSld>
-    <p:spTree>
-      <p:nvGrpSpPr>
-        <p:cNvPr id="1" name=""/>
-        <p:cNvGrpSpPr/>
-        <p:nvPr/>
-      </p:nvGrpSpPr>
-      <p:grpSpPr>
-        <a:xfrm>
-          <a:off x="0" y="0"/>
-          <a:ext cx="0" cy="0"/>
-          <a:chOff x="0" y="0"/>
-          <a:chExt cx="0" cy="0"/>
-        </a:xfrm>
-      </p:grpSpPr>
-      <p:sp>
-        <p:nvSpPr>
-          <p:cNvPr id="2" name="讲课提示"/>
-          <p:cNvSpPr txBox="1"/>
-          <p:nvPr/>
-        </p:nvSpPr>
-        <p:spPr>
-          <a:xfrm>
-            <a:off x="457200" y="457200"/>
-            <a:ext cx="6858000" cy="4800600"/>
-          </a:xfrm>
-          <a:prstGeom prst="rect">
-            <a:avLst/>
-          </a:prstGeom>
-        </p:spPr>
-        <p:txBody>
-          <a:bodyPr wrap="square"/>
-          <a:lstStyle/>
-          <a:p>
-            <a:r>
-              <a:rPr lang="zh-CN" dirty="0"/>
-              <a:t>第 88 节 · 核心知识点：API 概念与 Requests</a:t>
-            </a:r>
-          </a:p>
-          <a:p>
-            <a:r>
-              <a:rPr lang="zh-CN" dirty="0"/>
-              <a:t/>
-            </a:r>
-          </a:p>
-          <a:p>
-            <a:r>
-              <a:rPr lang="zh-CN" dirty="0"/>
-              <a:t>讲这一页时：先让学生说出上节课的结论，再逐块讲要点。</a:t>
-            </a:r>
-          </a:p>
-          <a:p>
-            <a:r>
-              <a:rPr lang="zh-CN" dirty="0"/>
-              <a:t>每讲完一块，问一句「这一步如果写错了，报错会长什么样？」——把错误提前讲。</a:t>
-            </a:r>
-          </a:p>
-          <a:p>
-            <a:r>
-              <a:rPr lang="zh-CN" dirty="0"/>
-              <a:t/>
-            </a:r>
-          </a:p>
-          <a:p>
-            <a:r>
-              <a:rPr lang="zh-CN" dirty="0"/>
-              <a:t>本节目标：理解 API 是什么；会用 requests.get 并检查 status_code、用 .json() 拿字典</a:t>
-            </a:r>
-          </a:p>
-          <a:p>
-            <a:r>
-              <a:rPr lang="zh-CN" dirty="0"/>
-              <a:t/>
-            </a:r>
-          </a:p>
-          <a:p>
-            <a:r>
-              <a:rPr lang="zh-CN" dirty="0"/>
-              <a:t>看不到懂的地方，回讲义对应小节读一遍，再回来对着这页复述一次——能讲出来才算真懂。</a:t>
-            </a:r>
-          </a:p>
-        </p:txBody>
-      </p:sp>
-      <p:sp>
-        <p:nvSpPr>
-          <p:cNvPr id="2" name="讲课提示"/>
-          <p:cNvSpPr txBox="1"/>
-          <p:nvPr/>
-        </p:nvSpPr>
-        <p:spPr>
-          <a:xfrm>
-            <a:off x="457200" y="457200"/>
-            <a:ext cx="6858000" cy="4800600"/>
-          </a:xfrm>
-          <a:prstGeom prst="rect">
-            <a:avLst/>
-          </a:prstGeom>
-        </p:spPr>
-        <p:txBody>
-          <a:bodyPr wrap="square"/>
-          <a:lstStyle/>
-          <a:p>
-            <a:r>
-              <a:rPr lang="zh-CN" dirty="0"/>
-              <a:t>第 88 节 · 核心知识点：API 概念与 Requests</a:t>
-            </a:r>
-          </a:p>
-          <a:p>
-            <a:r>
-              <a:rPr lang="zh-CN" dirty="0"/>
-              <a:t/>
-            </a:r>
-          </a:p>
-          <a:p>
-            <a:r>
-              <a:rPr lang="zh-CN" dirty="0"/>
-              <a:t>讲这一页时：先让学生说出上节课的结论，再逐块讲要点。</a:t>
-            </a:r>
-          </a:p>
-          <a:p>
-            <a:r>
-              <a:rPr lang="zh-CN" dirty="0"/>
-              <a:t>每讲完一块，问一句「这一步如果写错了，报错会长什么样？」——把错误提前讲。</a:t>
-            </a:r>
-          </a:p>
-          <a:p>
-            <a:r>
-              <a:rPr lang="zh-CN" dirty="0"/>
-              <a:t/>
-            </a:r>
-          </a:p>
-          <a:p>
-            <a:r>
-              <a:rPr lang="zh-CN" dirty="0"/>
-              <a:t>本节目标：理解 API 是什么；会用 requests.get 并检查 status_code、用 .json() 拿字典</a:t>
-            </a:r>
-          </a:p>
-          <a:p>
-            <a:r>
-              <a:rPr lang="zh-CN" dirty="0"/>
-              <a:t/>
-            </a:r>
-          </a:p>
-          <a:p>
-            <a:r>
-              <a:rPr lang="zh-CN" dirty="0"/>
-              <a:t>看不到懂的地方，回讲义对应小节读一遍，再回来对着这页复述一次——能讲出来才算真懂。</a:t>
-            </a:r>
-          </a:p>
-        </p:txBody>
-      </p:sp>
-    </p:spTree>
-  </p:cSld>
-  <p:clrMapOvr>
-    <a:masterClrMapping/>
-  </p:clrMapOvr>
-</p:notes>
-</file>
-
-<file path=ppt/notesSlides/notesSlide4.xml><?xml version="1.0" encoding="utf-8"?>
-<p:notes xmlns:a="http://schemas.openxmlformats.org/drawingml/2006/main" xmlns:p="http://schemas.openxmlformats.org/presentationml/2006/main" xmlns:r="http://schemas.openxmlformats.org/officeDocument/2006/relationships">
-  <p:cSld>
-    <p:spTree>
-      <p:nvGrpSpPr>
-        <p:cNvPr id="1" name=""/>
-        <p:cNvGrpSpPr/>
-        <p:nvPr/>
-      </p:nvGrpSpPr>
-      <p:grpSpPr>
-        <a:xfrm>
-          <a:off x="0" y="0"/>
-          <a:ext cx="0" cy="0"/>
-          <a:chOff x="0" y="0"/>
-          <a:chExt cx="0" cy="0"/>
-        </a:xfrm>
-      </p:grpSpPr>
-      <p:sp>
-        <p:nvSpPr>
-          <p:cNvPr id="2" name="讲课提示"/>
-          <p:cNvSpPr txBox="1"/>
-          <p:nvPr/>
-        </p:nvSpPr>
-        <p:spPr>
-          <a:xfrm>
-            <a:off x="457200" y="457200"/>
-            <a:ext cx="6858000" cy="4800600"/>
-          </a:xfrm>
-          <a:prstGeom prst="rect">
-            <a:avLst/>
-          </a:prstGeom>
-        </p:spPr>
-        <p:txBody>
-          <a:bodyPr wrap="square"/>
-          <a:lstStyle/>
-          <a:p>
-            <a:r>
-              <a:rPr lang="zh-CN" dirty="0"/>
-              <a:t>第 89 节 · GitHub API 与速率限制</a:t>
-            </a:r>
-          </a:p>
-          <a:p>
-            <a:r>
-              <a:rPr lang="zh-CN" dirty="0"/>
-              <a:t>单元 17 · 使用 API 与 Plotly · W21–W22</a:t>
-            </a:r>
-          </a:p>
-          <a:p>
-            <a:r>
-              <a:rPr lang="zh-CN" dirty="0"/>
-              <a:t/>
-            </a:r>
-          </a:p>
-          <a:p>
-            <a:r>
-              <a:rPr lang="zh-CN" dirty="0"/>
-              <a:t>学习目标：会调 GitHub search API 提取仓库信息；知道未认证每小时 60 次的限制</a:t>
-            </a:r>
-          </a:p>
-          <a:p>
-            <a:r>
-              <a:rPr lang="zh-CN" dirty="0"/>
-              <a:t/>
-            </a:r>
-          </a:p>
-          <a:p>
-            <a:r>
-              <a:rPr lang="zh-CN" dirty="0"/>
-              <a:t>课堂实操（40 分钟，不看答案）：</a:t>
-            </a:r>
-          </a:p>
-          <a:p>
-            <a:r>
-              <a:rPr lang="zh-CN" dirty="0"/>
-              <a:t>· 提取前 5 个热门仓库的 name / stars / url</a:t>
-            </a:r>
-          </a:p>
-          <a:p>
-            <a:r>
-              <a:rPr lang="zh-CN" dirty="0"/>
-              <a:t>· 打印 X-RateLimit-Remaining 看剩余次数</a:t>
-            </a:r>
-          </a:p>
-          <a:p>
-            <a:r>
-              <a:rPr lang="zh-CN" dirty="0"/>
-              <a:t/>
-            </a:r>
-          </a:p>
-          <a:p>
-            <a:r>
-              <a:rPr lang="zh-CN" dirty="0"/>
-              <a:t>课后作业：</a:t>
-            </a:r>
-          </a:p>
-          <a:p>
-            <a:r>
-              <a:rPr lang="zh-CN" dirty="0"/>
-              <a:t>· ★ 给自己常看的语言拉一份 TOP 20 仓库</a:t>
-            </a:r>
-          </a:p>
-          <a:p>
-            <a:r>
-              <a:rPr lang="zh-CN" dirty="0"/>
-              <a:t/>
-            </a:r>
-          </a:p>
-          <a:p>
-            <a:r>
-              <a:rPr lang="zh-CN" dirty="0"/>
-              <a:t>节奏：讲 20 分钟 → 学员自己敲 40 分钟（不看答案）→ 对讲评自查 20 分钟 → 写作业 10 分钟。</a:t>
-            </a:r>
-          </a:p>
-        </p:txBody>
-      </p:sp>
-      <p:sp>
-        <p:nvSpPr>
-          <p:cNvPr id="2" name="讲课提示"/>
-          <p:cNvSpPr txBox="1"/>
-          <p:nvPr/>
-        </p:nvSpPr>
-        <p:spPr>
-          <a:xfrm>
-            <a:off x="457200" y="457200"/>
-            <a:ext cx="6858000" cy="4800600"/>
-          </a:xfrm>
-          <a:prstGeom prst="rect">
-            <a:avLst/>
-          </a:prstGeom>
-        </p:spPr>
-        <p:txBody>
-          <a:bodyPr wrap="square"/>
-          <a:lstStyle/>
-          <a:p>
-            <a:r>
-              <a:rPr lang="zh-CN" dirty="0"/>
-              <a:t>第 89 节 · GitHub API 与速率限制</a:t>
-            </a:r>
-          </a:p>
-          <a:p>
-            <a:r>
-              <a:rPr lang="zh-CN" dirty="0"/>
-              <a:t>单元 17 · 使用 API 与 Plotly · W21–W22</a:t>
-            </a:r>
-          </a:p>
-          <a:p>
-            <a:r>
-              <a:rPr lang="zh-CN" dirty="0"/>
-              <a:t/>
-            </a:r>
-          </a:p>
-          <a:p>
-            <a:r>
-              <a:rPr lang="zh-CN" dirty="0"/>
-              <a:t>学习目标：会调 GitHub search API 提取仓库信息；知道未认证每小时 60 次的限制</a:t>
-            </a:r>
-          </a:p>
-          <a:p>
-            <a:r>
-              <a:rPr lang="zh-CN" dirty="0"/>
-              <a:t/>
-            </a:r>
-          </a:p>
-          <a:p>
-            <a:r>
-              <a:rPr lang="zh-CN" dirty="0"/>
-              <a:t>课堂实操（40 分钟，不看答案）：</a:t>
-            </a:r>
-          </a:p>
-          <a:p>
-            <a:r>
-              <a:rPr lang="zh-CN" dirty="0"/>
-              <a:t>· 提取前 5 个热门仓库的 name / stars / url</a:t>
-            </a:r>
-          </a:p>
-          <a:p>
-            <a:r>
-              <a:rPr lang="zh-CN" dirty="0"/>
-              <a:t>· 打印 X-RateLimit-Remaining 看剩余次数</a:t>
-            </a:r>
-          </a:p>
-          <a:p>
-            <a:r>
-              <a:rPr lang="zh-CN" dirty="0"/>
-              <a:t/>
-            </a:r>
-          </a:p>
-          <a:p>
-            <a:r>
-              <a:rPr lang="zh-CN" dirty="0"/>
-              <a:t>课后作业：</a:t>
-            </a:r>
-          </a:p>
-          <a:p>
-            <a:r>
-              <a:rPr lang="zh-CN" dirty="0"/>
-              <a:t>· ★ 给自己常看的语言拉一份 TOP 20 仓库</a:t>
-            </a:r>
-          </a:p>
-          <a:p>
-            <a:r>
-              <a:rPr lang="zh-CN" dirty="0"/>
-              <a:t/>
-            </a:r>
-          </a:p>
-          <a:p>
-            <a:r>
-              <a:rPr lang="zh-CN" dirty="0"/>
-              <a:t>节奏：讲 20 分钟 → 学员自己敲 40 分钟（不看答案）→ 对讲评自查 20 分钟 → 写作业 10 分钟。</a:t>
-            </a:r>
-          </a:p>
-        </p:txBody>
-      </p:sp>
-    </p:spTree>
-  </p:cSld>
-  <p:clrMapOvr>
-    <a:masterClrMapping/>
-  </p:clrMapOvr>
-</p:notes>
-</file>
-
-<file path=ppt/notesSlides/notesSlide5.xml><?xml version="1.0" encoding="utf-8"?>
-<p:notes xmlns:a="http://schemas.openxmlformats.org/drawingml/2006/main" xmlns:p="http://schemas.openxmlformats.org/presentationml/2006/main" xmlns:r="http://schemas.openxmlformats.org/officeDocument/2006/relationships">
-  <p:cSld>
-    <p:spTree>
-      <p:nvGrpSpPr>
-        <p:cNvPr id="1" name=""/>
-        <p:cNvGrpSpPr/>
-        <p:nvPr/>
-      </p:nvGrpSpPr>
-      <p:grpSpPr>
-        <a:xfrm>
-          <a:off x="0" y="0"/>
-          <a:ext cx="0" cy="0"/>
-          <a:chOff x="0" y="0"/>
-          <a:chExt cx="0" cy="0"/>
-        </a:xfrm>
-      </p:grpSpPr>
-      <p:sp>
-        <p:nvSpPr>
-          <p:cNvPr id="2" name="讲课提示"/>
-          <p:cNvSpPr txBox="1"/>
-          <p:nvPr/>
-        </p:nvSpPr>
-        <p:spPr>
-          <a:xfrm>
-            <a:off x="457200" y="457200"/>
-            <a:ext cx="6858000" cy="4800600"/>
-          </a:xfrm>
-          <a:prstGeom prst="rect">
-            <a:avLst/>
-          </a:prstGeom>
-        </p:spPr>
-        <p:txBody>
-          <a:bodyPr wrap="square"/>
-          <a:lstStyle/>
-          <a:p>
-            <a:r>
-              <a:rPr lang="zh-CN" dirty="0"/>
-              <a:t>第 89 节 · 核心知识点：GitHub API 与速率限制</a:t>
-            </a:r>
-          </a:p>
-          <a:p>
-            <a:r>
-              <a:rPr lang="zh-CN" dirty="0"/>
-              <a:t/>
-            </a:r>
-          </a:p>
-          <a:p>
-            <a:r>
-              <a:rPr lang="zh-CN" dirty="0"/>
-              <a:t>讲这一页时：先让学生说出上节课的结论，再逐块讲要点。</a:t>
-            </a:r>
-          </a:p>
-          <a:p>
-            <a:r>
-              <a:rPr lang="zh-CN" dirty="0"/>
-              <a:t>每讲完一块，问一句「这一步如果写错了，报错会长什么样？」——把错误提前讲。</a:t>
-            </a:r>
-          </a:p>
-          <a:p>
-            <a:r>
-              <a:rPr lang="zh-CN" dirty="0"/>
-              <a:t/>
-            </a:r>
-          </a:p>
-          <a:p>
-            <a:r>
-              <a:rPr lang="zh-CN" dirty="0"/>
-              <a:t>本节目标：会调 GitHub search API 提取仓库信息；知道未认证每小时 60 次的限制</a:t>
-            </a:r>
-          </a:p>
-          <a:p>
-            <a:r>
-              <a:rPr lang="zh-CN" dirty="0"/>
-              <a:t/>
-            </a:r>
-          </a:p>
-          <a:p>
-            <a:r>
-              <a:rPr lang="zh-CN" dirty="0"/>
-              <a:t>看不到懂的地方，回讲义对应小节读一遍，再回来对着这页复述一次——能讲出来才算真懂。</a:t>
-            </a:r>
-          </a:p>
-        </p:txBody>
-      </p:sp>
-      <p:sp>
-        <p:nvSpPr>
-          <p:cNvPr id="2" name="讲课提示"/>
-          <p:cNvSpPr txBox="1"/>
-          <p:nvPr/>
-        </p:nvSpPr>
-        <p:spPr>
-          <a:xfrm>
-            <a:off x="457200" y="457200"/>
-            <a:ext cx="6858000" cy="4800600"/>
-          </a:xfrm>
-          <a:prstGeom prst="rect">
-            <a:avLst/>
-          </a:prstGeom>
-        </p:spPr>
-        <p:txBody>
-          <a:bodyPr wrap="square"/>
-          <a:lstStyle/>
-          <a:p>
-            <a:r>
-              <a:rPr lang="zh-CN" dirty="0"/>
-              <a:t>第 89 节 · 核心知识点：GitHub API 与速率限制</a:t>
-            </a:r>
-          </a:p>
-          <a:p>
-            <a:r>
-              <a:rPr lang="zh-CN" dirty="0"/>
-              <a:t/>
-            </a:r>
-          </a:p>
-          <a:p>
-            <a:r>
-              <a:rPr lang="zh-CN" dirty="0"/>
-              <a:t>讲这一页时：先让学生说出上节课的结论，再逐块讲要点。</a:t>
-            </a:r>
-          </a:p>
-          <a:p>
-            <a:r>
-              <a:rPr lang="zh-CN" dirty="0"/>
-              <a:t>每讲完一块，问一句「这一步如果写错了，报错会长什么样？」——把错误提前讲。</a:t>
-            </a:r>
-          </a:p>
-          <a:p>
-            <a:r>
-              <a:rPr lang="zh-CN" dirty="0"/>
-              <a:t/>
-            </a:r>
-          </a:p>
-          <a:p>
-            <a:r>
-              <a:rPr lang="zh-CN" dirty="0"/>
-              <a:t>本节目标：会调 GitHub search API 提取仓库信息；知道未认证每小时 60 次的限制</a:t>
-            </a:r>
-          </a:p>
-          <a:p>
-            <a:r>
-              <a:rPr lang="zh-CN" dirty="0"/>
-              <a:t/>
-            </a:r>
-          </a:p>
-          <a:p>
-            <a:r>
-              <a:rPr lang="zh-CN" dirty="0"/>
-              <a:t>看不到懂的地方，回讲义对应小节读一遍，再回来对着这页复述一次——能讲出来才算真懂。</a:t>
-            </a:r>
-          </a:p>
-        </p:txBody>
-      </p:sp>
-    </p:spTree>
-  </p:cSld>
-  <p:clrMapOvr>
-    <a:masterClrMapping/>
-  </p:clrMapOvr>
-</p:notes>
-</file>
-
-<file path=ppt/notesSlides/notesSlide6.xml><?xml version="1.0" encoding="utf-8"?>
-<p:notes xmlns:a="http://schemas.openxmlformats.org/drawingml/2006/main" xmlns:p="http://schemas.openxmlformats.org/presentationml/2006/main" xmlns:r="http://schemas.openxmlformats.org/officeDocument/2006/relationships">
-  <p:cSld>
-    <p:spTree>
-      <p:nvGrpSpPr>
-        <p:cNvPr id="1" name=""/>
-        <p:cNvGrpSpPr/>
-        <p:nvPr/>
-      </p:nvGrpSpPr>
-      <p:grpSpPr>
-        <a:xfrm>
-          <a:off x="0" y="0"/>
-          <a:ext cx="0" cy="0"/>
-          <a:chOff x="0" y="0"/>
-          <a:chExt cx="0" cy="0"/>
-        </a:xfrm>
-      </p:grpSpPr>
-      <p:sp>
-        <p:nvSpPr>
-          <p:cNvPr id="2" name="讲课提示"/>
-          <p:cNvSpPr txBox="1"/>
-          <p:nvPr/>
-        </p:nvSpPr>
-        <p:spPr>
-          <a:xfrm>
-            <a:off x="457200" y="457200"/>
-            <a:ext cx="6858000" cy="4800600"/>
-          </a:xfrm>
-          <a:prstGeom prst="rect">
-            <a:avLst/>
-          </a:prstGeom>
-        </p:spPr>
-        <p:txBody>
-          <a:bodyPr wrap="square"/>
-          <a:lstStyle/>
-          <a:p>
-            <a:r>
-              <a:rPr lang="zh-CN" dirty="0"/>
-              <a:t>第 90 节 · Plotly 可视化与可点击链接</a:t>
-            </a:r>
-          </a:p>
-          <a:p>
-            <a:r>
-              <a:rPr lang="zh-CN" dirty="0"/>
-              <a:t>单元 17 · 使用 API 与 Plotly · W22</a:t>
-            </a:r>
-          </a:p>
-          <a:p>
-            <a:r>
-              <a:rPr lang="zh-CN" dirty="0"/>
-              <a:t/>
-            </a:r>
-          </a:p>
-          <a:p>
-            <a:r>
-              <a:rPr lang="zh-CN" dirty="0"/>
-              <a:t>学习目标：会用 px.bar 可视化；会用 customdata + hovertemplate 做可点击链接</a:t>
-            </a:r>
-          </a:p>
-          <a:p>
-            <a:r>
-              <a:rPr lang="zh-CN" dirty="0"/>
-              <a:t/>
-            </a:r>
-          </a:p>
-          <a:p>
-            <a:r>
-              <a:rPr lang="zh-CN" dirty="0"/>
-              <a:t>课堂实操（40 分钟，不看答案）：</a:t>
-            </a:r>
-          </a:p>
-          <a:p>
-            <a:r>
-              <a:rPr lang="zh-CN" dirty="0"/>
-              <a:t>· 画出仓库条形图并加悬停内容</a:t>
-            </a:r>
-          </a:p>
-          <a:p>
-            <a:r>
-              <a:rPr lang="zh-CN" dirty="0"/>
-              <a:t>· 让图表里的仓库名能点击跳转</a:t>
-            </a:r>
-          </a:p>
-          <a:p>
-            <a:r>
-              <a:rPr lang="zh-CN" dirty="0"/>
-              <a:t/>
-            </a:r>
-          </a:p>
-          <a:p>
-            <a:r>
-              <a:rPr lang="zh-CN" dirty="0"/>
-              <a:t>课后作业：</a:t>
-            </a:r>
-          </a:p>
-          <a:p>
-            <a:r>
-              <a:rPr lang="zh-CN" dirty="0"/>
-              <a:t>· 完成教材 17.2 全部动手练</a:t>
-            </a:r>
-          </a:p>
-          <a:p>
-            <a:r>
-              <a:rPr lang="zh-CN" dirty="0"/>
-              <a:t/>
-            </a:r>
-          </a:p>
-          <a:p>
-            <a:r>
-              <a:rPr lang="zh-CN" dirty="0"/>
-              <a:t>节奏：讲 20 分钟 → 学员自己敲 40 分钟（不看答案）→ 对讲评自查 20 分钟 → 写作业 10 分钟。</a:t>
-            </a:r>
-          </a:p>
-        </p:txBody>
-      </p:sp>
-      <p:sp>
-        <p:nvSpPr>
-          <p:cNvPr id="2" name="讲课提示"/>
-          <p:cNvSpPr txBox="1"/>
-          <p:nvPr/>
-        </p:nvSpPr>
-        <p:spPr>
-          <a:xfrm>
-            <a:off x="457200" y="457200"/>
-            <a:ext cx="6858000" cy="4800600"/>
-          </a:xfrm>
-          <a:prstGeom prst="rect">
-            <a:avLst/>
-          </a:prstGeom>
-        </p:spPr>
-        <p:txBody>
-          <a:bodyPr wrap="square"/>
-          <a:lstStyle/>
-          <a:p>
-            <a:r>
-              <a:rPr lang="zh-CN" dirty="0"/>
-              <a:t>第 90 节 · Plotly 可视化与可点击链接</a:t>
-            </a:r>
-          </a:p>
-          <a:p>
-            <a:r>
-              <a:rPr lang="zh-CN" dirty="0"/>
-              <a:t>单元 17 · 使用 API 与 Plotly · W22</a:t>
-            </a:r>
-          </a:p>
-          <a:p>
-            <a:r>
-              <a:rPr lang="zh-CN" dirty="0"/>
-              <a:t/>
-            </a:r>
-          </a:p>
-          <a:p>
-            <a:r>
-              <a:rPr lang="zh-CN" dirty="0"/>
-              <a:t>学习目标：会用 px.bar 可视化；会用 customdata + hovertemplate 做可点击链接</a:t>
-            </a:r>
-          </a:p>
-          <a:p>
-            <a:r>
-              <a:rPr lang="zh-CN" dirty="0"/>
-              <a:t/>
-            </a:r>
-          </a:p>
-          <a:p>
-            <a:r>
-              <a:rPr lang="zh-CN" dirty="0"/>
-              <a:t>课堂实操（40 分钟，不看答案）：</a:t>
-            </a:r>
-          </a:p>
-          <a:p>
-            <a:r>
-              <a:rPr lang="zh-CN" dirty="0"/>
-              <a:t>· 画出仓库条形图并加悬停内容</a:t>
-            </a:r>
-          </a:p>
-          <a:p>
-            <a:r>
-              <a:rPr lang="zh-CN" dirty="0"/>
-              <a:t>· 让图表里的仓库名能点击跳转</a:t>
-            </a:r>
-          </a:p>
-          <a:p>
-            <a:r>
-              <a:rPr lang="zh-CN" dirty="0"/>
-              <a:t/>
-            </a:r>
-          </a:p>
-          <a:p>
-            <a:r>
-              <a:rPr lang="zh-CN" dirty="0"/>
-              <a:t>课后作业：</a:t>
-            </a:r>
-          </a:p>
-          <a:p>
-            <a:r>
-              <a:rPr lang="zh-CN" dirty="0"/>
-              <a:t>· 完成教材 17.2 全部动手练</a:t>
-            </a:r>
-          </a:p>
-          <a:p>
-            <a:r>
-              <a:rPr lang="zh-CN" dirty="0"/>
-              <a:t/>
-            </a:r>
-          </a:p>
-          <a:p>
-            <a:r>
-              <a:rPr lang="zh-CN" dirty="0"/>
-              <a:t>节奏：讲 20 分钟 → 学员自己敲 40 分钟（不看答案）→ 对讲评自查 20 分钟 → 写作业 10 分钟。</a:t>
-            </a:r>
-          </a:p>
-        </p:txBody>
-      </p:sp>
-    </p:spTree>
-  </p:cSld>
-  <p:clrMapOvr>
-    <a:masterClrMapping/>
-  </p:clrMapOvr>
-</p:notes>
-</file>
-
-<file path=ppt/notesSlides/notesSlide7.xml><?xml version="1.0" encoding="utf-8"?>
-<p:notes xmlns:a="http://schemas.openxmlformats.org/drawingml/2006/main" xmlns:p="http://schemas.openxmlformats.org/presentationml/2006/main" xmlns:r="http://schemas.openxmlformats.org/officeDocument/2006/relationships">
-  <p:cSld>
-    <p:spTree>
-      <p:nvGrpSpPr>
-        <p:cNvPr id="1" name=""/>
-        <p:cNvGrpSpPr/>
-        <p:nvPr/>
-      </p:nvGrpSpPr>
-      <p:grpSpPr>
-        <a:xfrm>
-          <a:off x="0" y="0"/>
-          <a:ext cx="0" cy="0"/>
-          <a:chOff x="0" y="0"/>
-          <a:chExt cx="0" cy="0"/>
-        </a:xfrm>
-      </p:grpSpPr>
-      <p:sp>
-        <p:nvSpPr>
-          <p:cNvPr id="2" name="讲课提示"/>
-          <p:cNvSpPr txBox="1"/>
-          <p:nvPr/>
-        </p:nvSpPr>
-        <p:spPr>
-          <a:xfrm>
-            <a:off x="457200" y="457200"/>
-            <a:ext cx="6858000" cy="4800600"/>
-          </a:xfrm>
-          <a:prstGeom prst="rect">
-            <a:avLst/>
-          </a:prstGeom>
-        </p:spPr>
-        <p:txBody>
-          <a:bodyPr wrap="square"/>
-          <a:lstStyle/>
-          <a:p>
-            <a:r>
-              <a:rPr lang="zh-CN" dirty="0"/>
-              <a:t>第 90 节 · 核心知识点：Plotly 可视化与可点击链接</a:t>
-            </a:r>
-          </a:p>
-          <a:p>
-            <a:r>
-              <a:rPr lang="zh-CN" dirty="0"/>
-              <a:t/>
-            </a:r>
-          </a:p>
-          <a:p>
-            <a:r>
-              <a:rPr lang="zh-CN" dirty="0"/>
-              <a:t>讲这一页时：先让学生说出上节课的结论，再逐块讲要点。</a:t>
-            </a:r>
-          </a:p>
-          <a:p>
-            <a:r>
-              <a:rPr lang="zh-CN" dirty="0"/>
-              <a:t>每讲完一块，问一句「这一步如果写错了，报错会长什么样？」——把错误提前讲。</a:t>
-            </a:r>
-          </a:p>
-          <a:p>
-            <a:r>
-              <a:rPr lang="zh-CN" dirty="0"/>
-              <a:t/>
-            </a:r>
-          </a:p>
-          <a:p>
-            <a:r>
-              <a:rPr lang="zh-CN" dirty="0"/>
-              <a:t>本节目标：会用 px.bar 可视化；会用 customdata + hovertemplate 做可点击链接</a:t>
-            </a:r>
-          </a:p>
-          <a:p>
-            <a:r>
-              <a:rPr lang="zh-CN" dirty="0"/>
-              <a:t/>
-            </a:r>
-          </a:p>
-          <a:p>
-            <a:r>
-              <a:rPr lang="zh-CN" dirty="0"/>
-              <a:t>看不到懂的地方，回讲义对应小节读一遍，再回来对着这页复述一次——能讲出来才算真懂。</a:t>
-            </a:r>
-          </a:p>
-        </p:txBody>
-      </p:sp>
-      <p:sp>
-        <p:nvSpPr>
-          <p:cNvPr id="2" name="讲课提示"/>
-          <p:cNvSpPr txBox="1"/>
-          <p:nvPr/>
-        </p:nvSpPr>
-        <p:spPr>
-          <a:xfrm>
-            <a:off x="457200" y="457200"/>
-            <a:ext cx="6858000" cy="4800600"/>
-          </a:xfrm>
-          <a:prstGeom prst="rect">
-            <a:avLst/>
-          </a:prstGeom>
-        </p:spPr>
-        <p:txBody>
-          <a:bodyPr wrap="square"/>
-          <a:lstStyle/>
-          <a:p>
-            <a:r>
-              <a:rPr lang="zh-CN" dirty="0"/>
-              <a:t>第 90 节 · 核心知识点：Plotly 可视化与可点击链接</a:t>
-            </a:r>
-          </a:p>
-          <a:p>
-            <a:r>
-              <a:rPr lang="zh-CN" dirty="0"/>
-              <a:t/>
-            </a:r>
-          </a:p>
-          <a:p>
-            <a:r>
-              <a:rPr lang="zh-CN" dirty="0"/>
-              <a:t>讲这一页时：先让学生说出上节课的结论，再逐块讲要点。</a:t>
-            </a:r>
-          </a:p>
-          <a:p>
-            <a:r>
-              <a:rPr lang="zh-CN" dirty="0"/>
-              <a:t>每讲完一块，问一句「这一步如果写错了，报错会长什么样？」——把错误提前讲。</a:t>
-            </a:r>
-          </a:p>
-          <a:p>
-            <a:r>
-              <a:rPr lang="zh-CN" dirty="0"/>
-              <a:t/>
-            </a:r>
-          </a:p>
-          <a:p>
-            <a:r>
-              <a:rPr lang="zh-CN" dirty="0"/>
-              <a:t>本节目标：会用 px.bar 可视化；会用 customdata + hovertemplate 做可点击链接</a:t>
-            </a:r>
-          </a:p>
-          <a:p>
-            <a:r>
-              <a:rPr lang="zh-CN" dirty="0"/>
-              <a:t/>
-            </a:r>
-          </a:p>
-          <a:p>
-            <a:r>
-              <a:rPr lang="zh-CN" dirty="0"/>
-              <a:t>看不到懂的地方，回讲义对应小节读一遍，再回来对着这页复述一次——能讲出来才算真懂。</a:t>
-            </a:r>
-          </a:p>
-        </p:txBody>
-      </p:sp>
-    </p:spTree>
-  </p:cSld>
-  <p:clrMapOvr>
-    <a:masterClrMapping/>
-  </p:clrMapOvr>
-</p:notes>
-</file>
-
-<file path=ppt/notesSlides/notesSlide8.xml><?xml version="1.0" encoding="utf-8"?>
-<p:notes xmlns:a="http://schemas.openxmlformats.org/drawingml/2006/main" xmlns:p="http://schemas.openxmlformats.org/presentationml/2006/main" xmlns:r="http://schemas.openxmlformats.org/officeDocument/2006/relationships">
-  <p:cSld>
-    <p:spTree>
-      <p:nvGrpSpPr>
-        <p:cNvPr id="1" name=""/>
-        <p:cNvGrpSpPr/>
-        <p:nvPr/>
-      </p:nvGrpSpPr>
-      <p:grpSpPr>
-        <a:xfrm>
-          <a:off x="0" y="0"/>
-          <a:ext cx="0" cy="0"/>
-          <a:chOff x="0" y="0"/>
-          <a:chExt cx="0" cy="0"/>
-        </a:xfrm>
-      </p:grpSpPr>
-      <p:sp>
-        <p:nvSpPr>
-          <p:cNvPr id="2" name="讲课提示"/>
-          <p:cNvSpPr txBox="1"/>
-          <p:nvPr/>
-        </p:nvSpPr>
-        <p:spPr>
-          <a:xfrm>
-            <a:off x="457200" y="457200"/>
-            <a:ext cx="6858000" cy="4800600"/>
-          </a:xfrm>
-          <a:prstGeom prst="rect">
-            <a:avLst/>
-          </a:prstGeom>
-        </p:spPr>
-        <p:txBody>
-          <a:bodyPr wrap="square"/>
-          <a:lstStyle/>
-          <a:p>
-            <a:r>
-              <a:rPr lang="zh-CN" dirty="0"/>
-              <a:t>第 91 节 · Hacker News API 与动手实战</a:t>
-            </a:r>
-          </a:p>
-          <a:p>
-            <a:r>
-              <a:rPr lang="zh-CN" dirty="0"/>
-              <a:t>单元 17 · 使用 API 与 Plotly · W22</a:t>
-            </a:r>
-          </a:p>
-          <a:p>
-            <a:r>
-              <a:rPr lang="zh-CN" dirty="0"/>
-              <a:t/>
-            </a:r>
-          </a:p>
-          <a:p>
-            <a:r>
-              <a:rPr lang="zh-CN" dirty="0"/>
-              <a:t>学习目标：掌握「先拿列表再取详情」的两段式调用；给 API 调用加容错</a:t>
-            </a:r>
-          </a:p>
-          <a:p>
-            <a:r>
-              <a:rPr lang="zh-CN" dirty="0"/>
-              <a:t/>
-            </a:r>
-          </a:p>
-          <a:p>
-            <a:r>
-              <a:rPr lang="zh-CN" dirty="0"/>
-              <a:t>课堂实操（40 分钟，不看答案）：</a:t>
-            </a:r>
-          </a:p>
-          <a:p>
-            <a:r>
-              <a:rPr lang="zh-CN" dirty="0"/>
-              <a:t>· 实现 Hacker News 抓取</a:t>
-            </a:r>
-          </a:p>
-          <a:p>
-            <a:r>
-              <a:rPr lang="zh-CN" dirty="0"/>
-              <a:t>· 故意让某个 id 请求失败，看程序会不会崩</a:t>
-            </a:r>
-          </a:p>
-          <a:p>
-            <a:r>
-              <a:rPr lang="zh-CN" dirty="0"/>
-              <a:t/>
-            </a:r>
-          </a:p>
-          <a:p>
-            <a:r>
-              <a:rPr lang="zh-CN" dirty="0"/>
-              <a:t>课后作业：</a:t>
-            </a:r>
-          </a:p>
-          <a:p>
-            <a:r>
-              <a:rPr lang="zh-CN" dirty="0"/>
-              <a:t>· ★ 产出：能拉 GitHub 数据并出交互图的脚本</a:t>
-            </a:r>
-          </a:p>
-          <a:p>
-            <a:r>
-              <a:rPr lang="zh-CN" dirty="0"/>
-              <a:t/>
-            </a:r>
-          </a:p>
-          <a:p>
-            <a:r>
-              <a:rPr lang="zh-CN" dirty="0"/>
-              <a:t>节奏：讲 20 分钟 → 学员自己敲 40 分钟（不看答案）→ 对讲评自查 20 分钟 → 写作业 10 分钟。</a:t>
-            </a:r>
-          </a:p>
-        </p:txBody>
-      </p:sp>
-      <p:sp>
-        <p:nvSpPr>
-          <p:cNvPr id="2" name="讲课提示"/>
-          <p:cNvSpPr txBox="1"/>
-          <p:nvPr/>
-        </p:nvSpPr>
-        <p:spPr>
-          <a:xfrm>
-            <a:off x="457200" y="457200"/>
-            <a:ext cx="6858000" cy="4800600"/>
-          </a:xfrm>
-          <a:prstGeom prst="rect">
-            <a:avLst/>
-          </a:prstGeom>
-        </p:spPr>
-        <p:txBody>
-          <a:bodyPr wrap="square"/>
-          <a:lstStyle/>
-          <a:p>
-            <a:r>
-              <a:rPr lang="zh-CN" dirty="0"/>
-              <a:t>第 91 节 · Hacker News API 与动手实战</a:t>
-            </a:r>
-          </a:p>
-          <a:p>
-            <a:r>
-              <a:rPr lang="zh-CN" dirty="0"/>
-              <a:t>单元 17 · 使用 API 与 Plotly · W22</a:t>
-            </a:r>
-          </a:p>
-          <a:p>
-            <a:r>
-              <a:rPr lang="zh-CN" dirty="0"/>
-              <a:t/>
-            </a:r>
-          </a:p>
-          <a:p>
-            <a:r>
-              <a:rPr lang="zh-CN" dirty="0"/>
-              <a:t>学习目标：掌握「先拿列表再取详情」的两段式调用；给 API 调用加容错</a:t>
-            </a:r>
-          </a:p>
-          <a:p>
-            <a:r>
-              <a:rPr lang="zh-CN" dirty="0"/>
-              <a:t/>
-            </a:r>
-          </a:p>
-          <a:p>
-            <a:r>
-              <a:rPr lang="zh-CN" dirty="0"/>
-              <a:t>课堂实操（40 分钟，不看答案）：</a:t>
-            </a:r>
-          </a:p>
-          <a:p>
-            <a:r>
-              <a:rPr lang="zh-CN" dirty="0"/>
-              <a:t>· 实现 Hacker News 抓取</a:t>
-            </a:r>
-          </a:p>
-          <a:p>
-            <a:r>
-              <a:rPr lang="zh-CN" dirty="0"/>
-              <a:t>· 故意让某个 id 请求失败，看程序会不会崩</a:t>
-            </a:r>
-          </a:p>
-          <a:p>
-            <a:r>
-              <a:rPr lang="zh-CN" dirty="0"/>
-              <a:t/>
-            </a:r>
-          </a:p>
-          <a:p>
-            <a:r>
-              <a:rPr lang="zh-CN" dirty="0"/>
-              <a:t>课后作业：</a:t>
-            </a:r>
-          </a:p>
-          <a:p>
-            <a:r>
-              <a:rPr lang="zh-CN" dirty="0"/>
-              <a:t>· ★ 产出：能拉 GitHub 数据并出交互图的脚本</a:t>
-            </a:r>
-          </a:p>
-          <a:p>
-            <a:r>
-              <a:rPr lang="zh-CN" dirty="0"/>
-              <a:t/>
-            </a:r>
-          </a:p>
-          <a:p>
-            <a:r>
-              <a:rPr lang="zh-CN" dirty="0"/>
-              <a:t>节奏：讲 20 分钟 → 学员自己敲 40 分钟（不看答案）→ 对讲评自查 20 分钟 → 写作业 10 分钟。</a:t>
-            </a:r>
-          </a:p>
-        </p:txBody>
-      </p:sp>
-    </p:spTree>
-  </p:cSld>
-  <p:clrMapOvr>
-    <a:masterClrMapping/>
-  </p:clrMapOvr>
-</p:notes>
-</file>
-
-<file path=ppt/notesSlides/notesSlide9.xml><?xml version="1.0" encoding="utf-8"?>
-<p:notes xmlns:a="http://schemas.openxmlformats.org/drawingml/2006/main" xmlns:p="http://schemas.openxmlformats.org/presentationml/2006/main" xmlns:r="http://schemas.openxmlformats.org/officeDocument/2006/relationships">
-  <p:cSld>
-    <p:spTree>
-      <p:nvGrpSpPr>
-        <p:cNvPr id="1" name=""/>
-        <p:cNvGrpSpPr/>
-        <p:nvPr/>
-      </p:nvGrpSpPr>
-      <p:grpSpPr>
-        <a:xfrm>
-          <a:off x="0" y="0"/>
-          <a:ext cx="0" cy="0"/>
-          <a:chOff x="0" y="0"/>
-          <a:chExt cx="0" cy="0"/>
-        </a:xfrm>
-      </p:grpSpPr>
-      <p:sp>
-        <p:nvSpPr>
-          <p:cNvPr id="2" name="讲课提示"/>
-          <p:cNvSpPr txBox="1"/>
-          <p:nvPr/>
-        </p:nvSpPr>
-        <p:spPr>
-          <a:xfrm>
-            <a:off x="457200" y="457200"/>
-            <a:ext cx="6858000" cy="4800600"/>
-          </a:xfrm>
-          <a:prstGeom prst="rect">
-            <a:avLst/>
-          </a:prstGeom>
-        </p:spPr>
-        <p:txBody>
-          <a:bodyPr wrap="square"/>
-          <a:lstStyle/>
-          <a:p>
-            <a:r>
-              <a:rPr lang="zh-CN" dirty="0"/>
-              <a:t>第 91 节 · 核心知识点：Hacker News API 与动手实战</a:t>
-            </a:r>
-          </a:p>
-          <a:p>
-            <a:r>
-              <a:rPr lang="zh-CN" dirty="0"/>
-              <a:t/>
-            </a:r>
-          </a:p>
-          <a:p>
-            <a:r>
-              <a:rPr lang="zh-CN" dirty="0"/>
-              <a:t>讲这一页时：先让学生说出上节课的结论，再逐块讲要点。</a:t>
-            </a:r>
-          </a:p>
-          <a:p>
-            <a:r>
-              <a:rPr lang="zh-CN" dirty="0"/>
-              <a:t>每讲完一块，问一句「这一步如果写错了，报错会长什么样？」——把错误提前讲。</a:t>
-            </a:r>
-          </a:p>
-          <a:p>
-            <a:r>
-              <a:rPr lang="zh-CN" dirty="0"/>
-              <a:t/>
-            </a:r>
-          </a:p>
-          <a:p>
-            <a:r>
-              <a:rPr lang="zh-CN" dirty="0"/>
-              <a:t>本节目标：掌握「先拿列表再取详情」的两段式调用；给 API 调用加容错</a:t>
-            </a:r>
-          </a:p>
-          <a:p>
-            <a:r>
-              <a:rPr lang="zh-CN" dirty="0"/>
-              <a:t/>
-            </a:r>
-          </a:p>
-          <a:p>
-            <a:r>
-              <a:rPr lang="zh-CN" dirty="0"/>
-              <a:t>看不到懂的地方，回讲义对应小节读一遍，再回来对着这页复述一次——能讲出来才算真懂。</a:t>
-            </a:r>
-          </a:p>
-        </p:txBody>
-      </p:sp>
-      <p:sp>
-        <p:nvSpPr>
-          <p:cNvPr id="2" name="讲课提示"/>
-          <p:cNvSpPr txBox="1"/>
-          <p:nvPr/>
-        </p:nvSpPr>
-        <p:spPr>
-          <a:xfrm>
-            <a:off x="457200" y="457200"/>
-            <a:ext cx="6858000" cy="4800600"/>
-          </a:xfrm>
-          <a:prstGeom prst="rect">
-            <a:avLst/>
-          </a:prstGeom>
-        </p:spPr>
-        <p:txBody>
-          <a:bodyPr wrap="square"/>
-          <a:lstStyle/>
-          <a:p>
-            <a:r>
-              <a:rPr lang="zh-CN" dirty="0"/>
-              <a:t>第 91 节 · 核心知识点：Hacker News API 与动手实战</a:t>
-            </a:r>
-          </a:p>
-          <a:p>
-            <a:r>
-              <a:rPr lang="zh-CN" dirty="0"/>
-              <a:t/>
-            </a:r>
-          </a:p>
-          <a:p>
-            <a:r>
-              <a:rPr lang="zh-CN" dirty="0"/>
-              <a:t>讲这一页时：先让学生说出上节课的结论，再逐块讲要点。</a:t>
-            </a:r>
-          </a:p>
-          <a:p>
-            <a:r>
-              <a:rPr lang="zh-CN" dirty="0"/>
-              <a:t>每讲完一块，问一句「这一步如果写错了，报错会长什么样？」——把错误提前讲。</a:t>
-            </a:r>
-          </a:p>
-          <a:p>
-            <a:r>
-              <a:rPr lang="zh-CN" dirty="0"/>
-              <a:t/>
-            </a:r>
-          </a:p>
-          <a:p>
-            <a:r>
-              <a:rPr lang="zh-CN" dirty="0"/>
-              <a:t>本节目标：掌握「先拿列表再取详情」的两段式调用；给 API 调用加容错</a:t>
-            </a:r>
-          </a:p>
-          <a:p>
-            <a:r>
-              <a:rPr lang="zh-CN" dirty="0"/>
-              <a:t/>
-            </a:r>
-          </a:p>
-          <a:p>
-            <a:r>
-              <a:rPr lang="zh-CN" dirty="0"/>
-              <a:t>看不到懂的地方，回讲义对应小节读一遍，再回来对着这页复述一次——能讲出来才算真懂。</a:t>
-            </a:r>
-          </a:p>
-        </p:txBody>
-      </p:sp>
-    </p:spTree>
-  </p:cSld>
-  <p:clrMapOvr>
-    <a:masterClrMapping/>
-  </p:clrMapOvr>
-</p:notes>
-</file>
-
 <file path=ppt/slideLayouts/slideLayout1.xml><?xml version="1.0" encoding="utf-8"?>
 <p:sldLayout xmlns:p="http://schemas.openxmlformats.org/presentationml/2006/main" xmlns:a="http://schemas.openxmlformats.org/drawingml/2006/main">
   <p:cSld name="DEFAULT">
@@ -2367,7 +553,7 @@
   <p:cSld>
     <p:spTree>
       <p:nvGrpSpPr>
-        <p:cNvPr id="1" name="" descr="&lt;Slide style={{ width: '1280px', height: '720px', backgroundColor: '#FAFCFE', padding: 0, position: 'relative', overflow: 'hidden' }}&gt;&#13;&#10;    &lt;Box style={{ position: 'absolute', left: 0, top: 0, width: '1280px', height: '150px', background: '#1F5FA8' }} /&gt;&#13;&#10;    &lt;Box style={{ position: 'absolute', left: 64, top: 34, width: '1152px', flexDirection: 'column' }}&gt;&#13;&#10;        &lt;Text style={{ fontSize: 15, fontWeight: 'bold', color: '#BFD9F2', letterSpacing: 2 }}&gt;阶段 2 · 单元 17&lt;/Text&gt;&#13;&#10;        &lt;Text style={{ fontSize: 38, fontWeight: 'bold', color: '#FFFFFF', marginTop: 6 }}&gt;使用 API 与 Plotly&lt;/Text&gt;&#13;&#10;    &lt;/Box&gt;&#13;&#10;    &lt;Box style={{ position: 'absolute', left: 64, top: 168, width: '1152px', height: 470 }}&gt;&#13;&#10;        &lt;svg width='1152' height='470' viewBox='0 0 1152 470'&gt;&#13;&#10;            &lt;text x='0' y='18' fontSize='15' fontWeight='bold' fill='#16232E' fontFamily='Microsoft YaHei'&gt;本单元共 4 节课&lt;/text&gt;&#13;&#10;            &lt;rect x='0' y='196' width='1152' height='38' rx='7' fill='#FFFFFF' /&gt;&lt;text x='16' y='221' fontSize='15' fontWeight='bold' fill='#1F5FA8' fontFamily='Microsoft YaHei'&gt;第 88 节&lt;/text&gt;&lt;text x='96' y='221' fontSize='15' fill='#16232E' fontFamily='Microsoft YaHei'&gt;API 概念与 Requests&lt;/text&gt;&lt;text x='1080' y='221' fontSize='13' fill='#5A6B7A' textAnchor='end' fontFamily='Microsoft YaHei'&gt;W21&lt;/text&gt;&lt;rect x='0' y='238' width='1152' height='38' rx='7' fill='#F2F7FD' /&gt;&lt;text x='16' y='263' fontSize='15' fontWeight='bold' fill='#1F5FA8' fontFamily='Microsoft YaHei'&gt;第 89 节&lt;/text&gt;&lt;text x='96' y='263' fontSize='15' fill='#16232E' fontFamily='Microsoft YaHei'&gt;GitHub API 与速率限制&lt;/text&gt;&lt;text x='1080' y='263' fontSize='13' fill='#5A6B7A' textAnchor='end' fontFamily='Microsoft YaHei'&gt;W21&lt;/text&gt;&lt;rect x='0' y='280' width='1152' height='38' rx='7' fill='#FFFFFF' /&gt;&lt;text x='16' y='305' fontSize='15' fontWeight='bold' fill='#1F5FA8' fontFamily='Microsoft YaHei'&gt;第 90 节&lt;/text&gt;&lt;text x='96' y='305' fontSize='15' fill='#16232E' fontFamily='Microsoft YaHei'&gt;Plotly 可视化与可点击链接&lt;/text&gt;&lt;text x='1080' y='305' fontSize='13' fill='#5A6B7A' textAnchor='end' fontFamily='Microsoft YaHei'&gt;W21&lt;/text&gt;&lt;rect x='0' y='322' width='1152' height='38' rx='7' fill='#F2F7FD' /&gt;&lt;text x='16' y='347' fontSize='15' fontWeight='bold' fill='#1F5FA8' fontFamily='Microsoft YaHei'&gt;第 91 节&lt;/text&gt;&lt;text x='96' y='347' fontSize='15' fill='#16232E' fontFamily='Microsoft YaHei'&gt;Hacker News API 与动手实战&lt;/text&gt;&lt;text x='1080' y='347' fontSize='13' fill='#5A6B7A' textAnchor='end' fontFamily='Microsoft YaHei'&gt;W21&lt;/text&gt;&#13;&#10;        &lt;/svg&gt;&#13;&#10;    &lt;/Box&gt;&#13;&#10;    &lt;Box style={{ position: 'absolute', left: 64, bottom: 22, width: '1152px', flexDirection: 'row', justifyContent: 'space-between' }}&gt;&#13;&#10;        &lt;Text style={{ fontSize: 13, color: '#8A9AAA' }}&gt;Python 讲授课件 · 逐节版&lt;/Text&gt;&#13;&#10;        &lt;Text style={{ fontSize: 13, color: '#8A9AAA' }}&gt;单元 17 · 封面&lt;/Text&gt;&#13;&#10;    &lt;/Box&gt;&#13;&#10;&lt;/Slide&gt;&#13;&#10;"/>
+        <p:cNvPr id="1" name="" descr="&lt;Slide style={{ width: '1280px', height: '720px', backgroundColor: '#FAFCFE', padding: 0, position: 'relative', overflow: 'hidden' }}&gt;&#13;&#10;    &lt;Box style={{ position: 'absolute', left: 0, top: 0, width: '1280px', height: '150px', background: '#1F5FA8' }} /&gt;&#13;&#10;    &lt;Box style={{ position: 'absolute', left: 64, top: 34, width: '1152px', flexDirection: 'column' }}&gt;&#13;&#10;        &lt;Text style={{ fontSize: 15, fontWeight: 'bold', color: '#BFD9F2', letterSpacing: 2 }}&gt;阶段 2 · 单元 17&lt;/Text&gt;&#13;&#10;        &lt;Text style={{ fontSize: 38, fontWeight: 'bold', color: '#FFFFFF', marginTop: 6 }}&gt;使用 API 与 Plotly&lt;/Text&gt;&#13;&#10;    &lt;/Box&gt;&#13;&#10;    &lt;Box style={{ position: 'absolute', left: 64, top: 168, width: '1152px', height: 470 }}&gt;&#13;&#10;        &lt;svg width='1152' height='470' viewBox='0 0 1152 470'&gt;&#13;&#10;            &lt;text x='0' y='18' fontSize='15' fontWeight='bold' fill='#16232E' fontFamily='Microsoft YaHei'&gt;本单元共 4 节课&lt;/text&gt;&#13;&#10;            &lt;rect x='0' y='56.0' width='1152' height='48.0' rx='7' fill='#FFFFFF' /&gt;&lt;text x='16' y='85.0' fontSize='15' fontWeight='bold' fill='#1F5FA8' fontFamily='Microsoft YaHei'&gt;第 88 节&lt;/text&gt;&lt;text x='96' y='85.0' fontSize='15' fill='#16232E' fontFamily='Microsoft YaHei'&gt;API 概念与 Requests&lt;/text&gt;&lt;text x='1080' y='85.0' fontSize='13' fill='#5A6B7A' textAnchor='end' fontFamily='Microsoft YaHei'&gt;W21&lt;/text&gt;&lt;rect x='0' y='155.0' width='1152' height='48.0' rx='7' fill='#F2F7FD' /&gt;&lt;text x='16' y='184.0' fontSize='15' fontWeight='bold' fill='#1F5FA8' fontFamily='Microsoft YaHei'&gt;第 89 节&lt;/text&gt;&lt;text x='96' y='184.0' fontSize='15' fill='#16232E' fontFamily='Microsoft YaHei'&gt;GitHub API 与速率限制&lt;/text&gt;&lt;text x='1080' y='184.0' fontSize='13' fill='#5A6B7A' textAnchor='end' fontFamily='Microsoft YaHei'&gt;W21&lt;/text&gt;&lt;rect x='0' y='254.0' width='1152' height='48.0' rx='7' fill='#FFFFFF' /&gt;&lt;text x='16' y='283.0' fontSize='15' fontWeight='bold' fill='#1F5FA8' fontFamily='Microsoft YaHei'&gt;第 90 节&lt;/text&gt;&lt;text x='96' y='283.0' fontSize='15' fill='#16232E' fontFamily='Microsoft YaHei'&gt;Plotly 可视化与可点击链接&lt;/text&gt;&lt;text x='1080' y='283.0' fontSize='13' fill='#5A6B7A' textAnchor='end' fontFamily='Microsoft YaHei'&gt;W21&lt;/text&gt;&lt;rect x='0' y='353.0' width='1152' height='48.0' rx='7' fill='#F2F7FD' /&gt;&lt;text x='16' y='382.0' fontSize='15' fontWeight='bold' fill='#1F5FA8' fontFamily='Microsoft YaHei'&gt;第 91 节&lt;/text&gt;&lt;text x='96' y='382.0' fontSize='15' fill='#16232E' fontFamily='Microsoft YaHei'&gt;Hacker News API 与动手实战&lt;/text&gt;&lt;text x='1080' y='382.0' fontSize='13' fill='#5A6B7A' textAnchor='end' fontFamily='Microsoft YaHei'&gt;W21&lt;/text&gt;&#13;&#10;        &lt;/svg&gt;&#13;&#10;    &lt;/Box&gt;&#13;&#10;    &lt;Box style={{ position: 'absolute', left: 64, bottom: 22, width: '1152px', flexDirection: 'row', justifyContent: 'space-between' }}&gt;&#13;&#10;        &lt;Text style={{ fontSize: 13, color: '#8A9AAA' }}&gt;Python 讲授课件 · 逐节版&lt;/Text&gt;&#13;&#10;        &lt;Text style={{ fontSize: 13, color: '#8A9AAA' }}&gt;单元 17 · 封面&lt;/Text&gt;&#13;&#10;    &lt;/Box&gt;&#13;&#10;&lt;/Slide&gt;&#13;&#10;"/>
         <p:cNvGrpSpPr/>
         <p:nvPr/>
       </p:nvGrpSpPr>
@@ -3551,7 +1737,7 @@
   <p:cSld>
     <p:spTree>
       <p:nvGrpSpPr>
-        <p:cNvPr id="29" name="" descr="&lt;Slide style={{ width: '1280px', height: '720px', backgroundColor: '#FAFCFE', padding: 0, position: 'relative', overflow: 'hidden' }}&gt;&#13;&#10;    &lt;Box style={{ position: 'absolute', left: 64, top: 36, width: '1152px', flexDirection: 'row', alignItems: 'center', gap: 12 }}&gt;&#13;&#10;        &lt;Box style={{ background: '#0E9B78', borderRadius: 5, padding: '3px 11px' }}&gt;&#13;&#10;            &lt;Text style={{ fontSize: 14, fontWeight: 'bold', color: '#FFFFFF' }}&gt;第 88 节&lt;/Text&gt;&#13;&#10;        &lt;/Box&gt;&#13;&#10;        &lt;Text style={{ fontSize: 30, fontWeight: 'bold', color: '#16232E' }}&gt;核心知识点&lt;/Text&gt;&#13;&#10;        &lt;Text style={{ fontSize: 15, color: '#5A6B7A', marginTop: 10 }}&gt;· API 概念与 Requests&lt;/Text&gt;&#13;&#10;    &lt;/Box&gt;&#13;&#10;    &lt;Box style={{ position: 'absolute', left: 0, top: 0, width: '1280px', height: '720px' }}&gt;&#13;&#10;        &lt;svg width='1280' height='720' viewBox='0 0 1280 720'&gt;&#13;&#10;            &lt;rect x='64' y='96' width='368' height='330' rx='12' fill='#FFFFFF' stroke='#D8E3EE' /&gt;&lt;rect x='64' y='96' width='368' height='4' rx='2' fill='#1F5FA8' /&gt;&lt;text x='82' y='130' fontSize='15.5' fontWeight='bold' fill='#1F5FA8' textAnchor='start' fontFamily='Microsoft YaHei'&gt;2.1 API 是什么：餐厅服务员的类比&lt;/text&gt;&lt;text x='82' y='169.0' fontSize='13' fill='#3A4A58' textAnchor='start' fontFamily='Microsoft YaHei'&gt;· API（Application Programming Interface，应用程&lt;/text&gt;&lt;text x='82' y='188.5' fontSize='13' fill='#3A4A58' textAnchor='start' fontFamily='Microsoft YaHei'&gt;序编程接口） 是一种…&lt;/text&gt;&lt;rect x='468' y='96' width='368' height='330' rx='12' fill='#FFFFFF' stroke='#D8E3EE' /&gt;&lt;rect x='468' y='96' width='368' height='4' rx='2' fill='#1F5FA8' /&gt;&lt;text x='486' y='130' fontSize='15.5' fontWeight='bold' fill='#1F5FA8' textAnchor='start' fontFamily='Microsoft YaHei'&gt;2.2 requests.get() 与响应对象：先看 s…&lt;/text&gt;&lt;text x='486' y='169.0' fontSize='13' fill='#3A4A58' textAnchor='start' fontFamily='Microsoft YaHei'&gt;· status_code 必须先看，200 和 403 后面接的操作完&lt;/text&gt;&lt;text x='486' y='188.5' fontSize='13' fill='#3A4A58' textAnchor='start' fontFamily='Microsoft YaHei'&gt;全不同：&lt;/text&gt;&lt;rect x='872' y='96' width='368' height='330' rx='12' fill='#FFFFFF' stroke='#D8E3EE' /&gt;&lt;rect x='872' y='96' width='368' height='4' rx='2' fill='#1F5FA8' /&gt;&lt;text x='890' y='130' fontSize='15.5' fontWeight='bold' fill='#1F5FA8' textAnchor='start' fontFamily='Microsoft YaHei'&gt;2.3 .json()：把响应体变成字典 ★&lt;/text&gt;&lt;text x='890' y='169.0' fontSize='13' fill='#3A4A58' textAnchor='start' fontFamily='Microsoft YaHei'&gt;· 这是 API 调用最关键的一步：把 JSON 文本解析成 Py&lt;/text&gt;&lt;text x='890' y='188.5' fontSize='13' fill='#3A4A58' textAnchor='start' fontFamily='Microsoft YaHei'&gt;thon 的字典和列表，从此你就能用单元…&lt;/text&gt;&lt;rect x='64' y='574' width='1152' height='66' rx='12' fill='#EEF5FB' /&gt;&lt;text x='84' y='616' fontSize='14' fill='#243444' textAnchor='start' fontFamily='Microsoft YaHei'&gt;看不懂的地方先回讲义对应小节读一遍，再回来对着这页复述一次——能讲出来才算真懂。&lt;/text&gt;&#13;&#10;            &lt;text x='64' y='684' fontSize='13' fill='#8A9AAA' fontFamily='Microsoft YaHei'&gt;Python 讲授课件 · 逐节版&lt;/text&gt;&#13;&#10;            &lt;text x='1216' y='684' fontSize='13' fill='#8A9AAA' textAnchor='end' fontFamily='Microsoft YaHei'&gt;单元 17 · 第 88 节&lt;/text&gt;&#13;&#10;        &lt;/svg&gt;&#13;&#10;    &lt;/Box&gt;&#13;&#10;&lt;/Slide&gt;&#13;&#10;"/>
+        <p:cNvPr id="29" name="" descr="&lt;Slide style={{ width: '1280px', height: '720px', backgroundColor: '#FAFCFE', padding: 0, position: 'relative', overflow: 'hidden' }}&gt;&#13;&#10;    &lt;Box style={{ position: 'absolute', left: 64, top: 36, width: '1152px', flexDirection: 'row', alignItems: 'center', gap: 12 }}&gt;&#13;&#10;        &lt;Box style={{ background: '#0E9B78', borderRadius: 5, padding: '3px 11px' }}&gt;&#13;&#10;            &lt;Text style={{ fontSize: 14, fontWeight: 'bold', color: '#FFFFFF' }}&gt;第 88 节&lt;/Text&gt;&#13;&#10;        &lt;/Box&gt;&#13;&#10;        &lt;Text style={{ fontSize: 30, fontWeight: 'bold', color: '#16232E' }}&gt;核心知识点&lt;/Text&gt;&#13;&#10;        &lt;Text style={{ fontSize: 15, color: '#5A6B7A', marginTop: 10 }}&gt;· API 概念与 Requests&lt;/Text&gt;&#13;&#10;    &lt;/Box&gt;&#13;&#10;    &lt;Box style={{ position: 'absolute', left: 0, top: 0, width: '1280px', height: '720px' }}&gt;&#13;&#10;        &lt;svg width='1280' height='720' viewBox='0 0 1280 720'&gt;&#13;&#10;            &lt;rect x='64' y='96' width='368' height='330' rx='12' fill='#FFFFFF' stroke='#D8E3EE' /&gt;&lt;rect x='64' y='96' width='368' height='4' rx='2' fill='#1F5FA8' /&gt;&lt;text x='82' y='130' fontSize='15.5' fontWeight='bold' fill='#1F5FA8' textAnchor='start' fontFamily='Microsoft YaHei'&gt;2.1 API 是什么：餐厅服务员的类比&lt;/text&gt;&lt;text x='82' y='169.0' fontSize='13' fill='#3A4A58' textAnchor='start' fontFamily='Microsoft YaHei'&gt;· API（Application Programming Interface，&lt;/text&gt;&lt;text x='82' y='188.5' fontSize='13' fill='#3A4A58' textAnchor='start' fontFamily='Microsoft YaHei'&gt;应用程序编程接口）&lt;/text&gt;&lt;text x='82' y='217.0' fontSize='13' fill='#3A4A58' textAnchor='start' fontFamily='Microsoft YaHei'&gt;· 先建立一件容易被忽略的事&lt;/text&gt;&lt;rect x='468' y='96' width='368' height='330' rx='12' fill='#FFFFFF' stroke='#D8E3EE' /&gt;&lt;rect x='468' y='96' width='368' height='4' rx='2' fill='#1F5FA8' /&gt;&lt;text x='486' y='130' fontSize='15.5' fontWeight='bold' fill='#1F5FA8' textAnchor='start' fontFamily='Microsoft YaHei'&gt;2.2 requests.get() 与响应对象…&lt;/text&gt;&lt;text x='486' y='169.0' fontSize='13' fill='#3A4A58' textAnchor='start' fontFamily='Microsoft YaHei'&gt;· status_code 必须先看&lt;/text&gt;&lt;rect x='872' y='96' width='368' height='330' rx='12' fill='#FFFFFF' stroke='#D8E3EE' /&gt;&lt;rect x='872' y='96' width='368' height='4' rx='2' fill='#1F5FA8' /&gt;&lt;text x='890' y='130' fontSize='15.5' fontWeight='bold' fill='#1F5FA8' textAnchor='start' fontFamily='Microsoft YaHei'&gt;2.3 .json()：把响应体变成字典 ★&lt;/text&gt;&lt;text x='890' y='169.0' fontSize='13' fill='#3A4A58' textAnchor='start' fontFamily='Microsoft YaHei'&gt;· 取值路线就是一层层剥：response_dict[&quot;items&quot;][0]&lt;/text&gt;&lt;text x='890' y='188.5' fontSize='13' fill='#3A4A58' textAnchor='start' fontFamily='Microsoft YaHei'&gt;[&quot;owner&quot;][&quot;logi…&lt;/text&gt;&lt;rect x='64' y='574' width='1152' height='66' rx='12' fill='#EEF5FB' /&gt;&lt;text x='84' y='616' fontSize='14' fill='#243444' textAnchor='start' fontFamily='Microsoft YaHei'&gt;看不懂的地方先回讲义对应小节读一遍，再回来对着这页复述一次——能讲出来才算真懂。&lt;/text&gt;&#13;&#10;            &lt;text x='64' y='684' fontSize='13' fill='#8A9AAA' fontFamily='Microsoft YaHei'&gt;Python 讲授课件 · 逐节版&lt;/text&gt;&#13;&#10;            &lt;text x='1216' y='684' fontSize='13' fill='#8A9AAA' textAnchor='end' fontFamily='Microsoft YaHei'&gt;单元 17 · 第 88 节&lt;/text&gt;&#13;&#10;        &lt;/svg&gt;&#13;&#10;    &lt;/Box&gt;&#13;&#10;&lt;/Slide&gt;&#13;&#10;"/>
         <p:cNvGrpSpPr/>
         <p:nvPr/>
       </p:nvGrpSpPr>
@@ -4002,7 +2188,7 @@
   <p:cSld>
     <p:spTree>
       <p:nvGrpSpPr>
-        <p:cNvPr id="42" name="" descr="&lt;Slide style={{ width: '1280px', height: '720px', backgroundColor: '#FAFCFE', padding: 0, position: 'relative', overflow: 'hidden' }}&gt;&#13;&#10;    &lt;Box style={{ position: 'absolute', left: 64, top: 36, width: '1152px', flexDirection: 'row', alignItems: 'center', gap: 12 }}&gt;&#13;&#10;        &lt;Box style={{ background: '#0E9B78', borderRadius: 5, padding: '3px 11px' }}&gt;&#13;&#10;            &lt;Text style={{ fontSize: 14, fontWeight: 'bold', color: '#FFFFFF' }}&gt;第 89 节&lt;/Text&gt;&#13;&#10;        &lt;/Box&gt;&#13;&#10;        &lt;Text style={{ fontSize: 30, fontWeight: 'bold', color: '#16232E' }}&gt;核心知识点&lt;/Text&gt;&#13;&#10;        &lt;Text style={{ fontSize: 15, color: '#5A6B7A', marginTop: 10 }}&gt;· GitHub API 与速率限制&lt;/Text&gt;&#13;&#10;    &lt;/Box&gt;&#13;&#10;    &lt;Box style={{ position: 'absolute', left: 0, top: 0, width: '1280px', height: '720px' }}&gt;&#13;&#10;        &lt;svg width='1280' height='720' viewBox='0 0 1280 720'&gt;&#13;&#10;            &lt;rect x='64' y='96' width='548' height='330' rx='12' fill='#FFFFFF' stroke='#D8E3EE' /&gt;&lt;rect x='64' y='96' width='548' height='4' rx='2' fill='#1F5FA8' /&gt;&lt;text x='82' y='130' fontSize='15.5' fontWeight='bold' fill='#1F5FA8' textAnchor='start' fontFamily='Microsoft YaHei'&gt;2.4 GitHub search API：请求头与速率限…&lt;/text&gt;&lt;text x='82' y='169.0' fontSize='13' fill='#3A4A58' textAnchor='start' fontFamily='Microsoft YaHei'&gt;· 请求头（headers）是 API 的另一半。 教材这一步要求带上 headers = ｛&quot;Accep…&lt;/text&gt;&lt;text x='82' y='197.5' fontSize='13' fill='#3A4A58' textAnchor='start' fontFamily='Microsoft YaHei'&gt;· 速率限制。 任何正经 API 都有速率限制——服务器资源有限，人人每秒请求 1000 次&lt;/text&gt;&lt;text x='82' y='217.0' fontSize='13' fill='#3A4A58' textAnchor='start' fontFamily='Microsoft YaHei'&gt;网站就垮了。G…&lt;/text&gt;&lt;text x='82' y='245.5' fontSize='13' fill='#3A4A58' textAnchor='start' fontFamily='Microsoft YaHei'&gt;· 四条必须养成的工程习惯（教材 17.1 反复强调的）：请求包 try/except（否则断网&lt;/text&gt;&lt;text x='82' y='265.0' fontSize='13' fill='#3A4A58' textAnchor='start' fontFamily='Microsoft YaHei'&gt;就崩）、检…&lt;/text&gt;&lt;rect x='668' y='96' width='548' height='330' rx='12' fill='#FFFFFF' stroke='#D8E3EE' /&gt;&lt;rect x='668' y='96' width='548' height='4' rx='2' fill='#1F5FA8' /&gt;&lt;text x='686' y='130' fontSize='15.5' fontWeight='bold' fill='#1F5FA8' textAnchor='start' fontFamily='Microsoft YaHei'&gt;2.5 Plotly 可视化仓库：悬停提示与颜色&lt;/text&gt;&lt;text x='686' y='169.0' fontSize='13' fill='#3A4A58' textAnchor='start' fontFamily='Microsoft YaHei'&gt;· 数据齐了，进入 17.2。上一单元你用过 px.scatter_geo，这里换 px.bar——横向柱&lt;/text&gt;&lt;text x='686' y='188.5' fontSize='13' fill='#3A4A58' textAnchor='start' fontFamily='Microsoft YaHei'&gt;…&lt;/text&gt;&lt;rect x='64' y='574' width='1152' height='66' rx='12' fill='#EEF5FB' /&gt;&lt;text x='84' y='616' fontSize='14' fill='#243444' textAnchor='start' fontFamily='Microsoft YaHei'&gt;看不懂的地方先回讲义对应小节读一遍，再回来对着这页复述一次——能讲出来才算真懂。&lt;/text&gt;&#13;&#10;            &lt;text x='64' y='684' fontSize='13' fill='#8A9AAA' fontFamily='Microsoft YaHei'&gt;Python 讲授课件 · 逐节版&lt;/text&gt;&#13;&#10;            &lt;text x='1216' y='684' fontSize='13' fill='#8A9AAA' textAnchor='end' fontFamily='Microsoft YaHei'&gt;单元 17 · 第 89 节&lt;/text&gt;&#13;&#10;        &lt;/svg&gt;&#13;&#10;    &lt;/Box&gt;&#13;&#10;&lt;/Slide&gt;&#13;&#10;"/>
+        <p:cNvPr id="42" name="" descr="&lt;Slide style={{ width: '1280px', height: '720px', backgroundColor: '#FAFCFE', padding: 0, position: 'relative', overflow: 'hidden' }}&gt;&#13;&#10;    &lt;Box style={{ position: 'absolute', left: 64, top: 36, width: '1152px', flexDirection: 'row', alignItems: 'center', gap: 12 }}&gt;&#13;&#10;        &lt;Box style={{ background: '#0E9B78', borderRadius: 5, padding: '3px 11px' }}&gt;&#13;&#10;            &lt;Text style={{ fontSize: 14, fontWeight: 'bold', color: '#FFFFFF' }}&gt;第 89 节&lt;/Text&gt;&#13;&#10;        &lt;/Box&gt;&#13;&#10;        &lt;Text style={{ fontSize: 30, fontWeight: 'bold', color: '#16232E' }}&gt;核心知识点&lt;/Text&gt;&#13;&#10;        &lt;Text style={{ fontSize: 15, color: '#5A6B7A', marginTop: 10 }}&gt;· GitHub API 与速率限制&lt;/Text&gt;&#13;&#10;    &lt;/Box&gt;&#13;&#10;    &lt;Box style={{ position: 'absolute', left: 0, top: 0, width: '1280px', height: '720px' }}&gt;&#13;&#10;        &lt;svg width='1280' height='720' viewBox='0 0 1280 720'&gt;&#13;&#10;            &lt;rect x='64' y='96' width='548' height='330' rx='12' fill='#FFFFFF' stroke='#D8E3EE' /&gt;&lt;rect x='64' y='96' width='548' height='4' rx='2' fill='#1F5FA8' /&gt;&lt;text x='82' y='130' fontSize='15.5' fontWeight='bold' fill='#1F5FA8' textAnchor='start' fontFamily='Microsoft YaHei'&gt;2.4 GitHub search API…&lt;/text&gt;&lt;text x='82' y='169.0' fontSize='13' fill='#3A4A58' textAnchor='start' fontFamily='Microsoft YaHei'&gt;· 请求头（headers）是 API 的另一半。&lt;/text&gt;&lt;text x='82' y='197.5' fontSize='13' fill='#3A4A58' textAnchor='start' fontFamily='Microsoft YaHei'&gt;· 速率限制。&lt;/text&gt;&lt;text x='82' y='226.0' fontSize='13' fill='#3A4A58' textAnchor='start' fontFamily='Microsoft YaHei'&gt;· 四条必须养成的工程习惯&lt;/text&gt;&lt;rect x='668' y='96' width='548' height='330' rx='12' fill='#FFFFFF' stroke='#D8E3EE' /&gt;&lt;rect x='668' y='96' width='548' height='4' rx='2' fill='#1F5FA8' /&gt;&lt;text x='686' y='130' fontSize='15.5' fontWeight='bold' fill='#1F5FA8' textAnchor='start' fontFamily='Microsoft YaHei'&gt;2.5 Plotly 可视化仓库：悬停提示与颜色&lt;/text&gt;&lt;text x='686' y='169.0' fontSize='13' fill='#3A4A58' textAnchor='start' fontFamily='Microsoft YaHei'&gt;· 数据齐了，进入 17.2。&lt;/text&gt;&lt;rect x='64' y='574' width='1152' height='66' rx='12' fill='#EEF5FB' /&gt;&lt;text x='84' y='616' fontSize='14' fill='#243444' textAnchor='start' fontFamily='Microsoft YaHei'&gt;看不懂的地方先回讲义对应小节读一遍，再回来对着这页复述一次——能讲出来才算真懂。&lt;/text&gt;&#13;&#10;            &lt;text x='64' y='684' fontSize='13' fill='#8A9AAA' fontFamily='Microsoft YaHei'&gt;Python 讲授课件 · 逐节版&lt;/text&gt;&#13;&#10;            &lt;text x='1216' y='684' fontSize='13' fill='#8A9AAA' textAnchor='end' fontFamily='Microsoft YaHei'&gt;单元 17 · 第 89 节&lt;/text&gt;&#13;&#10;        &lt;/svg&gt;&#13;&#10;    &lt;/Box&gt;&#13;&#10;&lt;/Slide&gt;&#13;&#10;"/>
         <p:cNvGrpSpPr/>
         <p:nvPr/>
       </p:nvGrpSpPr>
@@ -4443,7 +2629,7 @@
   <p:cSld>
     <p:spTree>
       <p:nvGrpSpPr>
-        <p:cNvPr id="55" name="" descr="&lt;Slide style={{ width: '1280px', height: '720px', backgroundColor: '#FAFCFE', padding: 0, position: 'relative', overflow: 'hidden' }}&gt;&#13;&#10;    &lt;Box style={{ position: 'absolute', left: 64, top: 36, width: '1152px', flexDirection: 'row', alignItems: 'center', gap: 12 }}&gt;&#13;&#10;        &lt;Box style={{ background: '#0E9B78', borderRadius: 5, padding: '3px 11px' }}&gt;&#13;&#10;            &lt;Text style={{ fontSize: 14, fontWeight: 'bold', color: '#FFFFFF' }}&gt;第 90 节&lt;/Text&gt;&#13;&#10;        &lt;/Box&gt;&#13;&#10;        &lt;Text style={{ fontSize: 30, fontWeight: 'bold', color: '#16232E' }}&gt;核心知识点&lt;/Text&gt;&#13;&#10;        &lt;Text style={{ fontSize: 15, color: '#5A6B7A', marginTop: 10 }}&gt;· Plotly 可视化与可点击链接&lt;/Text&gt;&#13;&#10;    &lt;/Box&gt;&#13;&#10;    &lt;Box style={{ position: 'absolute', left: 0, top: 0, width: '1280px', height: '720px' }}&gt;&#13;&#10;        &lt;svg width='1280' height='720' viewBox='0 0 1280 720'&gt;&#13;&#10;            &lt;rect x='64' y='96' width='548' height='330' rx='12' fill='#FFFFFF' stroke='#D8E3EE' /&gt;&lt;rect x='64' y='96' width='548' height='4' rx='2' fill='#1F5FA8' /&gt;&lt;text x='82' y='130' fontSize='15.5' fontWeight='bold' fill='#1F5FA8' textAnchor='start' fontFamily='Microsoft YaHei'&gt;2.6 ★ 可单击链接：custom_data 与 hov…&lt;/text&gt;&lt;text x='82' y='169.0' fontSize='13' fill='#3A4A58' textAnchor='start' fontFamily='Microsoft YaHei'&gt;· 问题在哪？ Plotly 默认只把数据当纯文本显示。URL 看着像网址，但点不动。解法两&lt;/text&gt;&lt;text x='82' y='188.5' fontSize='13' fill='#3A4A58' textAnchor='start' fontFamily='Microsoft YaHei'&gt;步：custo…&lt;/text&gt;&lt;text x='82' y='217.0' fontSize='13' fill='#3A4A58' textAnchor='start' fontFamily='Microsoft YaHei'&gt;· 为什么链接文字是写死的？ HTML 的 ＜a href='地址'＞显示文字＜/a＞ 里地址和文&lt;/text&gt;&lt;text x='82' y='236.5' fontSize='13' fill='#3A4A58' textAnchor='start' fontFamily='Microsoft YaHei'&gt;字是两个…&lt;/text&gt;&lt;text x='82' y='265.0' fontSize='13' fill='#3A4A58' textAnchor='start' fontFamily='Microsoft YaHei'&gt;· 链接点了没反应？三个必查项： ① custom_data 的列名写错了（写 url 但 DataFra&lt;/text&gt;&lt;text x='82' y='284.5' fontSize='13' fill='#3A4A58' textAnchor='start' fontFamily='Microsoft YaHei'&gt;…&lt;/text&gt;&lt;rect x='668' y='96' width='548' height='330' rx='12' fill='#FFFFFF' stroke='#D8E3EE' /&gt;&lt;rect x='668' y='96' width='548' height='4' rx='2' fill='#1F5FA8' /&gt;&lt;text x='686' y='130' fontSize='15.5' fontWeight='bold' fill='#1F5FA8' textAnchor='start' fontFamily='Microsoft YaHei'&gt;2.7 Hacker News API：先拿列表、再取详情…&lt;/text&gt;&lt;text x='686' y='169.0' fontSize='13' fill='#3A4A58' textAnchor='start' fontFamily='Microsoft YaHei'&gt;· 为什么这么设计？ 因为它通用又省流量：一份 id 列表能配不同详情查询，组合出「当&lt;/text&gt;&lt;text x='686' y='188.5' fontSize='13' fill='#3A4A58' textAnchor='start' fontFamily='Microsoft YaHei'&gt;前最热」「某作者的帖…&lt;/text&gt;&lt;text x='64' y='470' fontSize='14.5' fontWeight='bold' fill='#0E9B78' textAnchor='start' fontFamily='Microsoft YaHei'&gt;本节的代码示例&lt;/text&gt;&lt;text x='64' y='500' fontSize='13' fill='#3A4A58' textAnchor='start' fontFamily='Microsoft YaHei'&gt;· 认识 API 网址的结构 + 第一次调用&lt;/text&gt;&lt;text x='468' y='500' fontSize='13' fill='#3A4A58' textAnchor='start' fontFamily='Microsoft YaHei'&gt;· 处理响应字典——提取平行列表&lt;/text&gt;&lt;text x='872' y='500' fontSize='13' fill='#3A4A58' textAnchor='start' fontFamily='Microsoft YaHei'&gt;· 速率限制守门员 + 缓存响应&lt;/text&gt;&lt;rect x='64' y='574' width='1152' height='66' rx='12' fill='#EEF5FB' /&gt;&lt;text x='84' y='616' fontSize='14' fill='#243444' textAnchor='start' fontFamily='Microsoft YaHei'&gt;看不懂的地方先回讲义对应小节读一遍，再回来对着这页复述一次——能讲出来才算真懂。&lt;/text&gt;&#13;&#10;            &lt;text x='64' y='684' fontSize='13' fill='#8A9AAA' fontFamily='Microsoft YaHei'&gt;Python 讲授课件 · 逐节版&lt;/text&gt;&#13;&#10;            &lt;text x='1216' y='684' fontSize='13' fill='#8A9AAA' textAnchor='end' fontFamily='Microsoft YaHei'&gt;单元 17 · 第 90 节&lt;/text&gt;&#13;&#10;        &lt;/svg&gt;&#13;&#10;    &lt;/Box&gt;&#13;&#10;&lt;/Slide&gt;&#13;&#10;"/>
+        <p:cNvPr id="55" name="" descr="&lt;Slide style={{ width: '1280px', height: '720px', backgroundColor: '#FAFCFE', padding: 0, position: 'relative', overflow: 'hidden' }}&gt;&#13;&#10;    &lt;Box style={{ position: 'absolute', left: 64, top: 36, width: '1152px', flexDirection: 'row', alignItems: 'center', gap: 12 }}&gt;&#13;&#10;        &lt;Box style={{ background: '#0E9B78', borderRadius: 5, padding: '3px 11px' }}&gt;&#13;&#10;            &lt;Text style={{ fontSize: 14, fontWeight: 'bold', color: '#FFFFFF' }}&gt;第 90 节&lt;/Text&gt;&#13;&#10;        &lt;/Box&gt;&#13;&#10;        &lt;Text style={{ fontSize: 30, fontWeight: 'bold', color: '#16232E' }}&gt;核心知识点&lt;/Text&gt;&#13;&#10;        &lt;Text style={{ fontSize: 15, color: '#5A6B7A', marginTop: 10 }}&gt;· Plotly 可视化与可点击链接&lt;/Text&gt;&#13;&#10;    &lt;/Box&gt;&#13;&#10;    &lt;Box style={{ position: 'absolute', left: 0, top: 0, width: '1280px', height: '720px' }}&gt;&#13;&#10;        &lt;svg width='1280' height='720' viewBox='0 0 1280 720'&gt;&#13;&#10;            &lt;rect x='64' y='96' width='548' height='330' rx='12' fill='#FFFFFF' stroke='#D8E3EE' /&gt;&lt;rect x='64' y='96' width='548' height='4' rx='2' fill='#1F5FA8' /&gt;&lt;text x='82' y='130' fontSize='15.5' fontWeight='bold' fill='#1F5FA8' textAnchor='start' fontFamily='Microsoft YaHei'&gt;2.6 ★ 可单击链接：custom_data 与 hov…&lt;/text&gt;&lt;text x='82' y='169.0' fontSize='13' fill='#3A4A58' textAnchor='start' fontFamily='Microsoft YaHei'&gt;· 问题在哪？&lt;/text&gt;&lt;text x='82' y='197.5' fontSize='13' fill='#3A4A58' textAnchor='start' fontFamily='Microsoft YaHei'&gt;· 为什么链接文字是写死的？&lt;/text&gt;&lt;rect x='668' y='96' width='548' height='330' rx='12' fill='#FFFFFF' stroke='#D8E3EE' /&gt;&lt;rect x='668' y='96' width='548' height='4' rx='2' fill='#1F5FA8' /&gt;&lt;text x='686' y='130' fontSize='15.5' fontWeight='bold' fill='#1F5FA8' textAnchor='start' fontFamily='Microsoft YaHei'&gt;2.7 Hacker News API：先拿列表…&lt;/text&gt;&lt;text x='686' y='169.0' fontSize='13' fill='#3A4A58' textAnchor='start' fontFamily='Microsoft YaHei'&gt;· 为什么这么设计？&lt;/text&gt;&lt;text x='64' y='470' fontSize='14.5' fontWeight='bold' fill='#0E9B78' textAnchor='start' fontFamily='Microsoft YaHei'&gt;本节的代码示例&lt;/text&gt;&lt;text x='64' y='500' fontSize='13' fill='#3A4A58' textAnchor='start' fontFamily='Microsoft YaHei'&gt;· 认识 API 网址的结构 + 第一次调用&lt;/text&gt;&lt;text x='468' y='500' fontSize='13' fill='#3A4A58' textAnchor='start' fontFamily='Microsoft YaHei'&gt;· 处理响应字典——提取平行列表&lt;/text&gt;&lt;text x='872' y='500' fontSize='13' fill='#3A4A58' textAnchor='start' fontFamily='Microsoft YaHei'&gt;· 速率限制守门员 + 缓存响应&lt;/text&gt;&lt;rect x='64' y='574' width='1152' height='66' rx='12' fill='#EEF5FB' /&gt;&lt;text x='84' y='616' fontSize='14' fill='#243444' textAnchor='start' fontFamily='Microsoft YaHei'&gt;看不懂的地方先回讲义对应小节读一遍，再回来对着这页复述一次——能讲出来才算真懂。&lt;/text&gt;&#13;&#10;            &lt;text x='64' y='684' fontSize='13' fill='#8A9AAA' fontFamily='Microsoft YaHei'&gt;Python 讲授课件 · 逐节版&lt;/text&gt;&#13;&#10;            &lt;text x='1216' y='684' fontSize='13' fill='#8A9AAA' textAnchor='end' fontFamily='Microsoft YaHei'&gt;单元 17 · 第 90 节&lt;/text&gt;&#13;&#10;        &lt;/svg&gt;&#13;&#10;    &lt;/Box&gt;&#13;&#10;&lt;/Slide&gt;&#13;&#10;"/>
         <p:cNvGrpSpPr/>
         <p:nvPr/>
       </p:nvGrpSpPr>
@@ -4884,7 +3070,7 @@
   <p:cSld>
     <p:spTree>
       <p:nvGrpSpPr>
-        <p:cNvPr id="68" name="" descr="&lt;Slide style={{ width: '1280px', height: '720px', backgroundColor: '#FAFCFE', padding: 0, position: 'relative', overflow: 'hidden' }}&gt;&#13;&#10;    &lt;Box style={{ position: 'absolute', left: 64, top: 36, width: '1152px', flexDirection: 'row', alignItems: 'center', gap: 12 }}&gt;&#13;&#10;        &lt;Box style={{ background: '#0E9B78', borderRadius: 5, padding: '3px 11px' }}&gt;&#13;&#10;            &lt;Text style={{ fontSize: 14, fontWeight: 'bold', color: '#FFFFFF' }}&gt;第 91 节&lt;/Text&gt;&#13;&#10;        &lt;/Box&gt;&#13;&#10;        &lt;Text style={{ fontSize: 30, fontWeight: 'bold', color: '#16232E' }}&gt;核心知识点&lt;/Text&gt;&#13;&#10;        &lt;Text style={{ fontSize: 15, color: '#5A6B7A', marginTop: 10 }}&gt;· Hacker News API 与动手实战&lt;/Text&gt;&#13;&#10;    &lt;/Box&gt;&#13;&#10;    &lt;Box style={{ position: 'absolute', left: 0, top: 0, width: '1280px', height: '720px' }}&gt;&#13;&#10;        &lt;svg width='1280' height='720' viewBox='0 0 1280 720'&gt;&#13;&#10;            &lt;rect x='64' y='96' width='368' height='330' rx='12' fill='#FFFFFF' stroke='#D8E3EE' /&gt;&lt;rect x='64' y='96' width='368' height='4' rx='2' fill='#1F5FA8' /&gt;&lt;text x='82' y='130' fontSize='15.5' fontWeight='bold' fill='#1F5FA8' textAnchor='start' fontFamily='Microsoft YaHei'&gt;基础档&lt;/text&gt;&lt;text x='82' y='169.0' fontSize='13' fill='#3A4A58' textAnchor='start' fontFamily='Microsoft YaHei'&gt;· 练习 17-1【API 网址解析器与响应字典解剖】&lt;/text&gt;&lt;text x='82' y='197.5' fontSize='13' fill='#3A4A58' textAnchor='start' fontFamily='Microsoft YaHei'&gt;· 练习 17-2【API 观测台】&lt;/text&gt;&lt;rect x='468' y='96' width='368' height='330' rx='12' fill='#FFFFFF' stroke='#D8E3EE' /&gt;&lt;rect x='468' y='96' width='368' height='4' rx='2' fill='#1F5FA8' /&gt;&lt;text x='486' y='130' fontSize='15.5' fontWeight='bold' fill='#1F5FA8' textAnchor='start' fontFamily='Microsoft YaHei'&gt;进阶档&lt;/text&gt;&lt;text x='486' y='169.0' fontSize='13' fill='#3A4A58' textAnchor='start' fontFamily='Microsoft YaHei'&gt;· 练习 17-3【★ 可点击的仓库榜（带缓存与兜底）】&lt;/text&gt;&lt;text x='486' y='197.5' fontSize='13' fill='#3A4A58' textAnchor='start' fontFamily='Microsoft YaHei'&gt;· 练习 17-4【Hacker News 摘要机】&lt;/text&gt;&lt;rect x='872' y='96' width='368' height='330' rx='12' fill='#FFFFFF' stroke='#D8E3EE' /&gt;&lt;rect x='872' y='96' width='368' height='4' rx='2' fill='#1F5FA8' /&gt;&lt;text x='890' y='130' fontSize='15.5' fontWeight='bold' fill='#1F5FA8' textAnchor='start' fontFamily='Microsoft YaHei'&gt;参考答案 17-1&lt;/text&gt;&lt;text x='890' y='169.0' fontSize='13' fill='#3A4A58' textAnchor='start' fontFamily='Microsoft YaHei'&gt;· import requests&lt;/text&gt;&lt;rect x='64' y='574' width='1152' height='66' rx='12' fill='#EEF5FB' /&gt;&lt;text x='84' y='616' fontSize='14' fill='#243444' textAnchor='start' fontFamily='Microsoft YaHei'&gt;看不懂的地方先回讲义对应小节读一遍，再回来对着这页复述一次——能讲出来才算真懂。&lt;/text&gt;&#13;&#10;            &lt;text x='64' y='684' fontSize='13' fill='#8A9AAA' fontFamily='Microsoft YaHei'&gt;Python 讲授课件 · 逐节版&lt;/text&gt;&#13;&#10;            &lt;text x='1216' y='684' fontSize='13' fill='#8A9AAA' textAnchor='end' fontFamily='Microsoft YaHei'&gt;单元 17 · 第 91 节&lt;/text&gt;&#13;&#10;        &lt;/svg&gt;&#13;&#10;    &lt;/Box&gt;&#13;&#10;&lt;/Slide&gt;&#13;&#10;"/>
+        <p:cNvPr id="68" name="" descr="&lt;Slide style={{ width: '1280px', height: '720px', backgroundColor: '#FAFCFE', padding: 0, position: 'relative', overflow: 'hidden' }}&gt;&#13;&#10;    &lt;Box style={{ position: 'absolute', left: 64, top: 36, width: '1152px', flexDirection: 'row', alignItems: 'center', gap: 12 }}&gt;&#13;&#10;        &lt;Box style={{ background: '#0E9B78', borderRadius: 5, padding: '3px 11px' }}&gt;&#13;&#10;            &lt;Text style={{ fontSize: 14, fontWeight: 'bold', color: '#FFFFFF' }}&gt;第 91 节&lt;/Text&gt;&#13;&#10;        &lt;/Box&gt;&#13;&#10;        &lt;Text style={{ fontSize: 30, fontWeight: 'bold', color: '#16232E' }}&gt;核心知识点&lt;/Text&gt;&#13;&#10;        &lt;Text style={{ fontSize: 15, color: '#5A6B7A', marginTop: 10 }}&gt;· Hacker News API 与动手实战&lt;/Text&gt;&#13;&#10;    &lt;/Box&gt;&#13;&#10;    &lt;Box style={{ position: 'absolute', left: 0, top: 0, width: '1280px', height: '720px' }}&gt;&#13;&#10;        &lt;svg width='1280' height='720' viewBox='0 0 1280 720'&gt;&#13;&#10;            &lt;rect x='64' y='96' width='368' height='330' rx='12' fill='#FFFFFF' stroke='#D8E3EE' /&gt;&lt;rect x='64' y='96' width='368' height='4' rx='2' fill='#1F5FA8' /&gt;&lt;text x='82' y='130' fontSize='15.5' fontWeight='bold' fill='#1F5FA8' textAnchor='start' fontFamily='Microsoft YaHei'&gt;基础档&lt;/text&gt;&lt;text x='82' y='169.0' fontSize='13' fill='#3A4A58' textAnchor='start' fontFamily='Microsoft YaHei'&gt;· 练习 17-1【API 网址解析器与响应字典解剖】&lt;/text&gt;&lt;text x='82' y='197.5' fontSize='13' fill='#3A4A58' textAnchor='start' fontFamily='Microsoft YaHei'&gt;· 练习 17-2【API 观测台】&lt;/text&gt;&lt;rect x='468' y='96' width='368' height='330' rx='12' fill='#FFFFFF' stroke='#D8E3EE' /&gt;&lt;rect x='468' y='96' width='368' height='4' rx='2' fill='#1F5FA8' /&gt;&lt;text x='486' y='130' fontSize='15.5' fontWeight='bold' fill='#1F5FA8' textAnchor='start' fontFamily='Microsoft YaHei'&gt;进阶档&lt;/text&gt;&lt;text x='486' y='169.0' fontSize='13' fill='#3A4A58' textAnchor='start' fontFamily='Microsoft YaHei'&gt;· 练习 17-3【★ 可点击的仓库榜（带缓存与兜底）】&lt;/text&gt;&lt;text x='486' y='197.5' fontSize='13' fill='#3A4A58' textAnchor='start' fontFamily='Microsoft YaHei'&gt;· 练习 17-4【Hacker News 摘要机】&lt;/text&gt;&lt;rect x='872' y='96' width='368' height='330' rx='12' fill='#FFFFFF' stroke='#D8E3EE' /&gt;&lt;rect x='872' y='96' width='368' height='4' rx='2' fill='#1F5FA8' /&gt;&lt;text x='890' y='130' fontSize='15.5' fontWeight='bold' fill='#1F5FA8' textAnchor='start' fontFamily='Microsoft YaHei'&gt;参考答案 17-4&lt;/text&gt;&lt;text x='890' y='169.0' fontSize='13' fill='#3A4A58' textAnchor='start' fontFamily='Microsoft YaHei'&gt;· 1. 简答题&lt;/text&gt;&lt;text x='890' y='197.5' fontSize='13' fill='#3A4A58' textAnchor='start' fontFamily='Microsoft YaHei'&gt;· 2. 判断题&lt;/text&gt;&lt;text x='890' y='226.0' fontSize='13' fill='#3A4A58' textAnchor='start' fontFamily='Microsoft YaHei'&gt;· 3. 简答题&lt;/text&gt;&lt;rect x='64' y='574' width='1152' height='66' rx='12' fill='#EEF5FB' /&gt;&lt;text x='84' y='616' fontSize='14' fill='#243444' textAnchor='start' fontFamily='Microsoft YaHei'&gt;看不懂的地方先回讲义对应小节读一遍，再回来对着这页复述一次——能讲出来才算真懂。&lt;/text&gt;&#13;&#10;            &lt;text x='64' y='684' fontSize='13' fill='#8A9AAA' fontFamily='Microsoft YaHei'&gt;Python 讲授课件 · 逐节版&lt;/text&gt;&#13;&#10;            &lt;text x='1216' y='684' fontSize='13' fill='#8A9AAA' textAnchor='end' fontFamily='Microsoft YaHei'&gt;单元 17 · 第 91 节&lt;/text&gt;&#13;&#10;        &lt;/svg&gt;&#13;&#10;    &lt;/Box&gt;&#13;&#10;&lt;/Slide&gt;&#13;&#10;"/>
         <p:cNvGrpSpPr/>
         <p:nvPr/>
       </p:nvGrpSpPr>

--- a/python-course-ppt/逐节课件/Python讲授课件-单元17.pptx
+++ b/python-course-ppt/逐节课件/Python讲授课件-单元17.pptx
@@ -234,6 +234,1038 @@
     </a:lvl9pPr>
   </p:notesStyle>
 </p:notesMaster>
+</file>
+
+<file path=ppt/notesSlides/notesSlide1.xml><?xml version="1.0" encoding="utf-8"?>
+<p:notes xmlns:a="http://schemas.openxmlformats.org/drawingml/2006/main" xmlns:p="http://schemas.openxmlformats.org/presentationml/2006/main" xmlns:r="http://schemas.openxmlformats.org/officeDocument/2006/relationships">
+  <p:cSld>
+    <p:spTree>
+      <p:nvGrpSpPr>
+        <p:cNvPr id="1" name=""/>
+        <p:cNvGrpSpPr/>
+        <p:nvPr/>
+      </p:nvGrpSpPr>
+      <p:grpSpPr>
+        <a:xfrm>
+          <a:off x="0" y="0"/>
+          <a:ext cx="0" cy="0"/>
+          <a:chOff x="0" y="0"/>
+          <a:chExt cx="0" cy="0"/>
+        </a:xfrm>
+      </p:grpSpPr>
+      <p:sp>
+        <p:nvSpPr>
+          <p:cNvPr id="2" name="讲课提示"/>
+          <p:cNvSpPr txBox="1"/>
+          <p:nvPr/>
+        </p:nvSpPr>
+        <p:spPr>
+          <a:xfrm>
+            <a:off x="457200" y="457200"/>
+            <a:ext cx="6858000" cy="4800600"/>
+          </a:xfrm>
+          <a:prstGeom prst="rect">
+            <a:avLst/>
+          </a:prstGeom>
+        </p:spPr>
+        <p:txBody>
+          <a:bodyPr wrap="square"/>
+          <a:lstStyle/>
+          <a:p>
+            <a:r>
+              <a:rPr lang="zh-CN" dirty="0"/>
+              <a:t>单元 17 · 单元 17 · 使用 API 与 Plotly</a:t>
+            </a:r>
+          </a:p>
+          <a:p>
+            <a:r>
+              <a:rPr lang="zh-CN" dirty="0"/>
+              <a:t/>
+            </a:r>
+          </a:p>
+          <a:p>
+            <a:r>
+              <a:rPr lang="zh-CN" dirty="0"/>
+              <a:t>本单元包含以下课节：</a:t>
+            </a:r>
+          </a:p>
+          <a:p>
+            <a:r>
+              <a:rPr lang="zh-CN" dirty="0"/>
+              <a:t>· 第 88 节 API 概念与 Requests</a:t>
+            </a:r>
+          </a:p>
+          <a:p>
+            <a:r>
+              <a:rPr lang="zh-CN" dirty="0"/>
+              <a:t>· 第 89 节 GitHub API 与速率限制</a:t>
+            </a:r>
+          </a:p>
+          <a:p>
+            <a:r>
+              <a:rPr lang="zh-CN" dirty="0"/>
+              <a:t>· 第 90 节 Plotly 可视化与可点击链接</a:t>
+            </a:r>
+          </a:p>
+          <a:p>
+            <a:r>
+              <a:rPr lang="zh-CN" dirty="0"/>
+              <a:t>· 第 91 节 Hacker News API 与动手实战</a:t>
+            </a:r>
+          </a:p>
+          <a:p>
+            <a:r>
+              <a:rPr lang="zh-CN" dirty="0"/>
+              <a:t/>
+            </a:r>
+          </a:p>
+          <a:p>
+            <a:r>
+              <a:rPr lang="zh-CN" dirty="0"/>
+              <a:t>开场用 3 分钟讲清：这个单元学完能做出什么，最后会被关卡怎么验。</a:t>
+            </a:r>
+          </a:p>
+        </p:txBody>
+      </p:sp>
+    </p:spTree>
+  </p:cSld>
+  <p:clrMapOvr>
+    <a:masterClrMapping/>
+  </p:clrMapOvr>
+</p:notes>
+</file>
+
+<file path=ppt/notesSlides/notesSlide10.xml><?xml version="1.0" encoding="utf-8"?>
+<p:notes xmlns:a="http://schemas.openxmlformats.org/drawingml/2006/main" xmlns:p="http://schemas.openxmlformats.org/presentationml/2006/main" xmlns:r="http://schemas.openxmlformats.org/officeDocument/2006/relationships">
+  <p:cSld>
+    <p:spTree>
+      <p:nvGrpSpPr>
+        <p:cNvPr id="1" name=""/>
+        <p:cNvGrpSpPr/>
+        <p:nvPr/>
+      </p:nvGrpSpPr>
+      <p:grpSpPr>
+        <a:xfrm>
+          <a:off x="0" y="0"/>
+          <a:ext cx="0" cy="0"/>
+          <a:chOff x="0" y="0"/>
+          <a:chExt cx="0" cy="0"/>
+        </a:xfrm>
+      </p:grpSpPr>
+      <p:sp>
+        <p:nvSpPr>
+          <p:cNvPr id="2" name="讲课提示"/>
+          <p:cNvSpPr txBox="1"/>
+          <p:nvPr/>
+        </p:nvSpPr>
+        <p:spPr>
+          <a:xfrm>
+            <a:off x="457200" y="457200"/>
+            <a:ext cx="6858000" cy="4800600"/>
+          </a:xfrm>
+          <a:prstGeom prst="rect">
+            <a:avLst/>
+          </a:prstGeom>
+        </p:spPr>
+        <p:txBody>
+          <a:bodyPr wrap="square"/>
+          <a:lstStyle/>
+          <a:p>
+            <a:r>
+              <a:rPr lang="zh-CN" dirty="0"/>
+              <a:t>单元 17 小结 · 单元 17 · 小结</a:t>
+            </a:r>
+          </a:p>
+          <a:p>
+            <a:r>
+              <a:rPr lang="zh-CN" dirty="0"/>
+              <a:t/>
+            </a:r>
+          </a:p>
+          <a:p>
+            <a:r>
+              <a:rPr lang="zh-CN" dirty="0"/>
+              <a:t>收尾动作：让学生合上讲义，口述本单元三个最重要的结论；说不出来的，回对应课节。</a:t>
+            </a:r>
+          </a:p>
+          <a:p>
+            <a:r>
+              <a:rPr lang="zh-CN" dirty="0"/>
+              <a:t>然后当场勾一遍本单元课节的「已完成」，没打勾的进下一单元前补掉。</a:t>
+            </a:r>
+          </a:p>
+        </p:txBody>
+      </p:sp>
+    </p:spTree>
+  </p:cSld>
+  <p:clrMapOvr>
+    <a:masterClrMapping/>
+  </p:clrMapOvr>
+</p:notes>
+</file>
+
+<file path=ppt/notesSlides/notesSlide2.xml><?xml version="1.0" encoding="utf-8"?>
+<p:notes xmlns:a="http://schemas.openxmlformats.org/drawingml/2006/main" xmlns:p="http://schemas.openxmlformats.org/presentationml/2006/main" xmlns:r="http://schemas.openxmlformats.org/officeDocument/2006/relationships">
+  <p:cSld>
+    <p:spTree>
+      <p:nvGrpSpPr>
+        <p:cNvPr id="1" name=""/>
+        <p:cNvGrpSpPr/>
+        <p:nvPr/>
+      </p:nvGrpSpPr>
+      <p:grpSpPr>
+        <a:xfrm>
+          <a:off x="0" y="0"/>
+          <a:ext cx="0" cy="0"/>
+          <a:chOff x="0" y="0"/>
+          <a:chExt cx="0" cy="0"/>
+        </a:xfrm>
+      </p:grpSpPr>
+      <p:sp>
+        <p:nvSpPr>
+          <p:cNvPr id="2" name="讲课提示"/>
+          <p:cNvSpPr txBox="1"/>
+          <p:nvPr/>
+        </p:nvSpPr>
+        <p:spPr>
+          <a:xfrm>
+            <a:off x="457200" y="457200"/>
+            <a:ext cx="6858000" cy="4800600"/>
+          </a:xfrm>
+          <a:prstGeom prst="rect">
+            <a:avLst/>
+          </a:prstGeom>
+        </p:spPr>
+        <p:txBody>
+          <a:bodyPr wrap="square"/>
+          <a:lstStyle/>
+          <a:p>
+            <a:r>
+              <a:rPr lang="zh-CN" dirty="0"/>
+              <a:t>第 88 节 · API 概念与 Requests</a:t>
+            </a:r>
+          </a:p>
+          <a:p>
+            <a:r>
+              <a:rPr lang="zh-CN" dirty="0"/>
+              <a:t>单元 17 · 使用 API 与 Plotly · W21</a:t>
+            </a:r>
+          </a:p>
+          <a:p>
+            <a:r>
+              <a:rPr lang="zh-CN" dirty="0"/>
+              <a:t/>
+            </a:r>
+          </a:p>
+          <a:p>
+            <a:r>
+              <a:rPr lang="zh-CN" dirty="0"/>
+              <a:t>学习目标：理解 API 是什么；会用 requests.get 并检查 status_code、用 .json() 拿字典</a:t>
+            </a:r>
+          </a:p>
+          <a:p>
+            <a:r>
+              <a:rPr lang="zh-CN" dirty="0"/>
+              <a:t/>
+            </a:r>
+          </a:p>
+          <a:p>
+            <a:r>
+              <a:rPr lang="zh-CN" dirty="0"/>
+              <a:t>课堂实操（40 分钟，不看答案）：</a:t>
+            </a:r>
+          </a:p>
+          <a:p>
+            <a:r>
+              <a:rPr lang="zh-CN" dirty="0"/>
+              <a:t>· 发一次请求并打印 status_code 与响应前 200 字符</a:t>
+            </a:r>
+          </a:p>
+          <a:p>
+            <a:r>
+              <a:rPr lang="zh-CN" dirty="0"/>
+              <a:t>· 故意请求一个不存在的 URL 看 404</a:t>
+            </a:r>
+          </a:p>
+          <a:p>
+            <a:r>
+              <a:rPr lang="zh-CN" dirty="0"/>
+              <a:t/>
+            </a:r>
+          </a:p>
+          <a:p>
+            <a:r>
+              <a:rPr lang="zh-CN" dirty="0"/>
+              <a:t>课后作业：</a:t>
+            </a:r>
+          </a:p>
+          <a:p>
+            <a:r>
+              <a:rPr lang="zh-CN" dirty="0"/>
+              <a:t>· 装好 requests 并跑通第一个 API 调用</a:t>
+            </a:r>
+          </a:p>
+          <a:p>
+            <a:r>
+              <a:rPr lang="zh-CN" dirty="0"/>
+              <a:t/>
+            </a:r>
+          </a:p>
+          <a:p>
+            <a:r>
+              <a:rPr lang="zh-CN" dirty="0"/>
+              <a:t>节奏：讲 20 分钟 → 学员自己敲 40 分钟（不看答案）→ 对讲评自查 20 分钟 → 写作业 10 分钟。</a:t>
+            </a:r>
+          </a:p>
+        </p:txBody>
+      </p:sp>
+    </p:spTree>
+  </p:cSld>
+  <p:clrMapOvr>
+    <a:masterClrMapping/>
+  </p:clrMapOvr>
+</p:notes>
+</file>
+
+<file path=ppt/notesSlides/notesSlide3.xml><?xml version="1.0" encoding="utf-8"?>
+<p:notes xmlns:a="http://schemas.openxmlformats.org/drawingml/2006/main" xmlns:p="http://schemas.openxmlformats.org/presentationml/2006/main" xmlns:r="http://schemas.openxmlformats.org/officeDocument/2006/relationships">
+  <p:cSld>
+    <p:spTree>
+      <p:nvGrpSpPr>
+        <p:cNvPr id="1" name=""/>
+        <p:cNvGrpSpPr/>
+        <p:nvPr/>
+      </p:nvGrpSpPr>
+      <p:grpSpPr>
+        <a:xfrm>
+          <a:off x="0" y="0"/>
+          <a:ext cx="0" cy="0"/>
+          <a:chOff x="0" y="0"/>
+          <a:chExt cx="0" cy="0"/>
+        </a:xfrm>
+      </p:grpSpPr>
+      <p:sp>
+        <p:nvSpPr>
+          <p:cNvPr id="2" name="讲课提示"/>
+          <p:cNvSpPr txBox="1"/>
+          <p:nvPr/>
+        </p:nvSpPr>
+        <p:spPr>
+          <a:xfrm>
+            <a:off x="457200" y="457200"/>
+            <a:ext cx="6858000" cy="4800600"/>
+          </a:xfrm>
+          <a:prstGeom prst="rect">
+            <a:avLst/>
+          </a:prstGeom>
+        </p:spPr>
+        <p:txBody>
+          <a:bodyPr wrap="square"/>
+          <a:lstStyle/>
+          <a:p>
+            <a:r>
+              <a:rPr lang="zh-CN" dirty="0"/>
+              <a:t>第 88 节 · 核心知识点：API 概念与 Requests</a:t>
+            </a:r>
+          </a:p>
+          <a:p>
+            <a:r>
+              <a:rPr lang="zh-CN" dirty="0"/>
+              <a:t/>
+            </a:r>
+          </a:p>
+          <a:p>
+            <a:r>
+              <a:rPr lang="zh-CN" dirty="0"/>
+              <a:t>讲这一页时：先让学生说出上节课的结论，再逐块讲要点。</a:t>
+            </a:r>
+          </a:p>
+          <a:p>
+            <a:r>
+              <a:rPr lang="zh-CN" dirty="0"/>
+              <a:t>每讲完一块，问一句「这一步如果写错了，报错会长什么样？」——把错误提前讲。</a:t>
+            </a:r>
+          </a:p>
+          <a:p>
+            <a:r>
+              <a:rPr lang="zh-CN" dirty="0"/>
+              <a:t/>
+            </a:r>
+          </a:p>
+          <a:p>
+            <a:r>
+              <a:rPr lang="zh-CN" dirty="0"/>
+              <a:t>本节目标：理解 API 是什么；会用 requests.get 并检查 status_code、用 .json() 拿字典</a:t>
+            </a:r>
+          </a:p>
+          <a:p>
+            <a:r>
+              <a:rPr lang="zh-CN" dirty="0"/>
+              <a:t/>
+            </a:r>
+          </a:p>
+          <a:p>
+            <a:r>
+              <a:rPr lang="zh-CN" dirty="0"/>
+              <a:t>看不到懂的地方，回讲义对应小节读一遍，再回来对着这页复述一次——能讲出来才算真懂。</a:t>
+            </a:r>
+          </a:p>
+        </p:txBody>
+      </p:sp>
+    </p:spTree>
+  </p:cSld>
+  <p:clrMapOvr>
+    <a:masterClrMapping/>
+  </p:clrMapOvr>
+</p:notes>
+</file>
+
+<file path=ppt/notesSlides/notesSlide4.xml><?xml version="1.0" encoding="utf-8"?>
+<p:notes xmlns:a="http://schemas.openxmlformats.org/drawingml/2006/main" xmlns:p="http://schemas.openxmlformats.org/presentationml/2006/main" xmlns:r="http://schemas.openxmlformats.org/officeDocument/2006/relationships">
+  <p:cSld>
+    <p:spTree>
+      <p:nvGrpSpPr>
+        <p:cNvPr id="1" name=""/>
+        <p:cNvGrpSpPr/>
+        <p:nvPr/>
+      </p:nvGrpSpPr>
+      <p:grpSpPr>
+        <a:xfrm>
+          <a:off x="0" y="0"/>
+          <a:ext cx="0" cy="0"/>
+          <a:chOff x="0" y="0"/>
+          <a:chExt cx="0" cy="0"/>
+        </a:xfrm>
+      </p:grpSpPr>
+      <p:sp>
+        <p:nvSpPr>
+          <p:cNvPr id="2" name="讲课提示"/>
+          <p:cNvSpPr txBox="1"/>
+          <p:nvPr/>
+        </p:nvSpPr>
+        <p:spPr>
+          <a:xfrm>
+            <a:off x="457200" y="457200"/>
+            <a:ext cx="6858000" cy="4800600"/>
+          </a:xfrm>
+          <a:prstGeom prst="rect">
+            <a:avLst/>
+          </a:prstGeom>
+        </p:spPr>
+        <p:txBody>
+          <a:bodyPr wrap="square"/>
+          <a:lstStyle/>
+          <a:p>
+            <a:r>
+              <a:rPr lang="zh-CN" dirty="0"/>
+              <a:t>第 89 节 · GitHub API 与速率限制</a:t>
+            </a:r>
+          </a:p>
+          <a:p>
+            <a:r>
+              <a:rPr lang="zh-CN" dirty="0"/>
+              <a:t>单元 17 · 使用 API 与 Plotly · W21–W22</a:t>
+            </a:r>
+          </a:p>
+          <a:p>
+            <a:r>
+              <a:rPr lang="zh-CN" dirty="0"/>
+              <a:t/>
+            </a:r>
+          </a:p>
+          <a:p>
+            <a:r>
+              <a:rPr lang="zh-CN" dirty="0"/>
+              <a:t>学习目标：会调 GitHub search API 提取仓库信息；知道未认证每小时 60 次的限制</a:t>
+            </a:r>
+          </a:p>
+          <a:p>
+            <a:r>
+              <a:rPr lang="zh-CN" dirty="0"/>
+              <a:t/>
+            </a:r>
+          </a:p>
+          <a:p>
+            <a:r>
+              <a:rPr lang="zh-CN" dirty="0"/>
+              <a:t>课堂实操（40 分钟，不看答案）：</a:t>
+            </a:r>
+          </a:p>
+          <a:p>
+            <a:r>
+              <a:rPr lang="zh-CN" dirty="0"/>
+              <a:t>· 提取前 5 个热门仓库的 name / stars / url</a:t>
+            </a:r>
+          </a:p>
+          <a:p>
+            <a:r>
+              <a:rPr lang="zh-CN" dirty="0"/>
+              <a:t>· 打印 X-RateLimit-Remaining 看剩余次数</a:t>
+            </a:r>
+          </a:p>
+          <a:p>
+            <a:r>
+              <a:rPr lang="zh-CN" dirty="0"/>
+              <a:t/>
+            </a:r>
+          </a:p>
+          <a:p>
+            <a:r>
+              <a:rPr lang="zh-CN" dirty="0"/>
+              <a:t>课后作业：</a:t>
+            </a:r>
+          </a:p>
+          <a:p>
+            <a:r>
+              <a:rPr lang="zh-CN" dirty="0"/>
+              <a:t>· ★ 给自己常看的语言拉一份 TOP 20 仓库</a:t>
+            </a:r>
+          </a:p>
+          <a:p>
+            <a:r>
+              <a:rPr lang="zh-CN" dirty="0"/>
+              <a:t/>
+            </a:r>
+          </a:p>
+          <a:p>
+            <a:r>
+              <a:rPr lang="zh-CN" dirty="0"/>
+              <a:t>节奏：讲 20 分钟 → 学员自己敲 40 分钟（不看答案）→ 对讲评自查 20 分钟 → 写作业 10 分钟。</a:t>
+            </a:r>
+          </a:p>
+        </p:txBody>
+      </p:sp>
+    </p:spTree>
+  </p:cSld>
+  <p:clrMapOvr>
+    <a:masterClrMapping/>
+  </p:clrMapOvr>
+</p:notes>
+</file>
+
+<file path=ppt/notesSlides/notesSlide5.xml><?xml version="1.0" encoding="utf-8"?>
+<p:notes xmlns:a="http://schemas.openxmlformats.org/drawingml/2006/main" xmlns:p="http://schemas.openxmlformats.org/presentationml/2006/main" xmlns:r="http://schemas.openxmlformats.org/officeDocument/2006/relationships">
+  <p:cSld>
+    <p:spTree>
+      <p:nvGrpSpPr>
+        <p:cNvPr id="1" name=""/>
+        <p:cNvGrpSpPr/>
+        <p:nvPr/>
+      </p:nvGrpSpPr>
+      <p:grpSpPr>
+        <a:xfrm>
+          <a:off x="0" y="0"/>
+          <a:ext cx="0" cy="0"/>
+          <a:chOff x="0" y="0"/>
+          <a:chExt cx="0" cy="0"/>
+        </a:xfrm>
+      </p:grpSpPr>
+      <p:sp>
+        <p:nvSpPr>
+          <p:cNvPr id="2" name="讲课提示"/>
+          <p:cNvSpPr txBox="1"/>
+          <p:nvPr/>
+        </p:nvSpPr>
+        <p:spPr>
+          <a:xfrm>
+            <a:off x="457200" y="457200"/>
+            <a:ext cx="6858000" cy="4800600"/>
+          </a:xfrm>
+          <a:prstGeom prst="rect">
+            <a:avLst/>
+          </a:prstGeom>
+        </p:spPr>
+        <p:txBody>
+          <a:bodyPr wrap="square"/>
+          <a:lstStyle/>
+          <a:p>
+            <a:r>
+              <a:rPr lang="zh-CN" dirty="0"/>
+              <a:t>第 89 节 · 核心知识点：GitHub API 与速率限制</a:t>
+            </a:r>
+          </a:p>
+          <a:p>
+            <a:r>
+              <a:rPr lang="zh-CN" dirty="0"/>
+              <a:t/>
+            </a:r>
+          </a:p>
+          <a:p>
+            <a:r>
+              <a:rPr lang="zh-CN" dirty="0"/>
+              <a:t>讲这一页时：先让学生说出上节课的结论，再逐块讲要点。</a:t>
+            </a:r>
+          </a:p>
+          <a:p>
+            <a:r>
+              <a:rPr lang="zh-CN" dirty="0"/>
+              <a:t>每讲完一块，问一句「这一步如果写错了，报错会长什么样？」——把错误提前讲。</a:t>
+            </a:r>
+          </a:p>
+          <a:p>
+            <a:r>
+              <a:rPr lang="zh-CN" dirty="0"/>
+              <a:t/>
+            </a:r>
+          </a:p>
+          <a:p>
+            <a:r>
+              <a:rPr lang="zh-CN" dirty="0"/>
+              <a:t>本节目标：会调 GitHub search API 提取仓库信息；知道未认证每小时 60 次的限制</a:t>
+            </a:r>
+          </a:p>
+          <a:p>
+            <a:r>
+              <a:rPr lang="zh-CN" dirty="0"/>
+              <a:t/>
+            </a:r>
+          </a:p>
+          <a:p>
+            <a:r>
+              <a:rPr lang="zh-CN" dirty="0"/>
+              <a:t>看不到懂的地方，回讲义对应小节读一遍，再回来对着这页复述一次——能讲出来才算真懂。</a:t>
+            </a:r>
+          </a:p>
+        </p:txBody>
+      </p:sp>
+    </p:spTree>
+  </p:cSld>
+  <p:clrMapOvr>
+    <a:masterClrMapping/>
+  </p:clrMapOvr>
+</p:notes>
+</file>
+
+<file path=ppt/notesSlides/notesSlide6.xml><?xml version="1.0" encoding="utf-8"?>
+<p:notes xmlns:a="http://schemas.openxmlformats.org/drawingml/2006/main" xmlns:p="http://schemas.openxmlformats.org/presentationml/2006/main" xmlns:r="http://schemas.openxmlformats.org/officeDocument/2006/relationships">
+  <p:cSld>
+    <p:spTree>
+      <p:nvGrpSpPr>
+        <p:cNvPr id="1" name=""/>
+        <p:cNvGrpSpPr/>
+        <p:nvPr/>
+      </p:nvGrpSpPr>
+      <p:grpSpPr>
+        <a:xfrm>
+          <a:off x="0" y="0"/>
+          <a:ext cx="0" cy="0"/>
+          <a:chOff x="0" y="0"/>
+          <a:chExt cx="0" cy="0"/>
+        </a:xfrm>
+      </p:grpSpPr>
+      <p:sp>
+        <p:nvSpPr>
+          <p:cNvPr id="2" name="讲课提示"/>
+          <p:cNvSpPr txBox="1"/>
+          <p:nvPr/>
+        </p:nvSpPr>
+        <p:spPr>
+          <a:xfrm>
+            <a:off x="457200" y="457200"/>
+            <a:ext cx="6858000" cy="4800600"/>
+          </a:xfrm>
+          <a:prstGeom prst="rect">
+            <a:avLst/>
+          </a:prstGeom>
+        </p:spPr>
+        <p:txBody>
+          <a:bodyPr wrap="square"/>
+          <a:lstStyle/>
+          <a:p>
+            <a:r>
+              <a:rPr lang="zh-CN" dirty="0"/>
+              <a:t>第 90 节 · Plotly 可视化与可点击链接</a:t>
+            </a:r>
+          </a:p>
+          <a:p>
+            <a:r>
+              <a:rPr lang="zh-CN" dirty="0"/>
+              <a:t>单元 17 · 使用 API 与 Plotly · W22</a:t>
+            </a:r>
+          </a:p>
+          <a:p>
+            <a:r>
+              <a:rPr lang="zh-CN" dirty="0"/>
+              <a:t/>
+            </a:r>
+          </a:p>
+          <a:p>
+            <a:r>
+              <a:rPr lang="zh-CN" dirty="0"/>
+              <a:t>学习目标：会用 px.bar 可视化；会用 customdata + hovertemplate 做可点击链接</a:t>
+            </a:r>
+          </a:p>
+          <a:p>
+            <a:r>
+              <a:rPr lang="zh-CN" dirty="0"/>
+              <a:t/>
+            </a:r>
+          </a:p>
+          <a:p>
+            <a:r>
+              <a:rPr lang="zh-CN" dirty="0"/>
+              <a:t>课堂实操（40 分钟，不看答案）：</a:t>
+            </a:r>
+          </a:p>
+          <a:p>
+            <a:r>
+              <a:rPr lang="zh-CN" dirty="0"/>
+              <a:t>· 画出仓库条形图并加悬停内容</a:t>
+            </a:r>
+          </a:p>
+          <a:p>
+            <a:r>
+              <a:rPr lang="zh-CN" dirty="0"/>
+              <a:t>· 让图表里的仓库名能点击跳转</a:t>
+            </a:r>
+          </a:p>
+          <a:p>
+            <a:r>
+              <a:rPr lang="zh-CN" dirty="0"/>
+              <a:t/>
+            </a:r>
+          </a:p>
+          <a:p>
+            <a:r>
+              <a:rPr lang="zh-CN" dirty="0"/>
+              <a:t>课后作业：</a:t>
+            </a:r>
+          </a:p>
+          <a:p>
+            <a:r>
+              <a:rPr lang="zh-CN" dirty="0"/>
+              <a:t>· 完成教材 17.2 全部动手练</a:t>
+            </a:r>
+          </a:p>
+          <a:p>
+            <a:r>
+              <a:rPr lang="zh-CN" dirty="0"/>
+              <a:t/>
+            </a:r>
+          </a:p>
+          <a:p>
+            <a:r>
+              <a:rPr lang="zh-CN" dirty="0"/>
+              <a:t>节奏：讲 20 分钟 → 学员自己敲 40 分钟（不看答案）→ 对讲评自查 20 分钟 → 写作业 10 分钟。</a:t>
+            </a:r>
+          </a:p>
+        </p:txBody>
+      </p:sp>
+    </p:spTree>
+  </p:cSld>
+  <p:clrMapOvr>
+    <a:masterClrMapping/>
+  </p:clrMapOvr>
+</p:notes>
+</file>
+
+<file path=ppt/notesSlides/notesSlide7.xml><?xml version="1.0" encoding="utf-8"?>
+<p:notes xmlns:a="http://schemas.openxmlformats.org/drawingml/2006/main" xmlns:p="http://schemas.openxmlformats.org/presentationml/2006/main" xmlns:r="http://schemas.openxmlformats.org/officeDocument/2006/relationships">
+  <p:cSld>
+    <p:spTree>
+      <p:nvGrpSpPr>
+        <p:cNvPr id="1" name=""/>
+        <p:cNvGrpSpPr/>
+        <p:nvPr/>
+      </p:nvGrpSpPr>
+      <p:grpSpPr>
+        <a:xfrm>
+          <a:off x="0" y="0"/>
+          <a:ext cx="0" cy="0"/>
+          <a:chOff x="0" y="0"/>
+          <a:chExt cx="0" cy="0"/>
+        </a:xfrm>
+      </p:grpSpPr>
+      <p:sp>
+        <p:nvSpPr>
+          <p:cNvPr id="2" name="讲课提示"/>
+          <p:cNvSpPr txBox="1"/>
+          <p:nvPr/>
+        </p:nvSpPr>
+        <p:spPr>
+          <a:xfrm>
+            <a:off x="457200" y="457200"/>
+            <a:ext cx="6858000" cy="4800600"/>
+          </a:xfrm>
+          <a:prstGeom prst="rect">
+            <a:avLst/>
+          </a:prstGeom>
+        </p:spPr>
+        <p:txBody>
+          <a:bodyPr wrap="square"/>
+          <a:lstStyle/>
+          <a:p>
+            <a:r>
+              <a:rPr lang="zh-CN" dirty="0"/>
+              <a:t>第 90 节 · 核心知识点：Plotly 可视化与可点击链接</a:t>
+            </a:r>
+          </a:p>
+          <a:p>
+            <a:r>
+              <a:rPr lang="zh-CN" dirty="0"/>
+              <a:t/>
+            </a:r>
+          </a:p>
+          <a:p>
+            <a:r>
+              <a:rPr lang="zh-CN" dirty="0"/>
+              <a:t>讲这一页时：先让学生说出上节课的结论，再逐块讲要点。</a:t>
+            </a:r>
+          </a:p>
+          <a:p>
+            <a:r>
+              <a:rPr lang="zh-CN" dirty="0"/>
+              <a:t>每讲完一块，问一句「这一步如果写错了，报错会长什么样？」——把错误提前讲。</a:t>
+            </a:r>
+          </a:p>
+          <a:p>
+            <a:r>
+              <a:rPr lang="zh-CN" dirty="0"/>
+              <a:t/>
+            </a:r>
+          </a:p>
+          <a:p>
+            <a:r>
+              <a:rPr lang="zh-CN" dirty="0"/>
+              <a:t>本节目标：会用 px.bar 可视化；会用 customdata + hovertemplate 做可点击链接</a:t>
+            </a:r>
+          </a:p>
+          <a:p>
+            <a:r>
+              <a:rPr lang="zh-CN" dirty="0"/>
+              <a:t/>
+            </a:r>
+          </a:p>
+          <a:p>
+            <a:r>
+              <a:rPr lang="zh-CN" dirty="0"/>
+              <a:t>看不到懂的地方，回讲义对应小节读一遍，再回来对着这页复述一次——能讲出来才算真懂。</a:t>
+            </a:r>
+          </a:p>
+        </p:txBody>
+      </p:sp>
+    </p:spTree>
+  </p:cSld>
+  <p:clrMapOvr>
+    <a:masterClrMapping/>
+  </p:clrMapOvr>
+</p:notes>
+</file>
+
+<file path=ppt/notesSlides/notesSlide8.xml><?xml version="1.0" encoding="utf-8"?>
+<p:notes xmlns:a="http://schemas.openxmlformats.org/drawingml/2006/main" xmlns:p="http://schemas.openxmlformats.org/presentationml/2006/main" xmlns:r="http://schemas.openxmlformats.org/officeDocument/2006/relationships">
+  <p:cSld>
+    <p:spTree>
+      <p:nvGrpSpPr>
+        <p:cNvPr id="1" name=""/>
+        <p:cNvGrpSpPr/>
+        <p:nvPr/>
+      </p:nvGrpSpPr>
+      <p:grpSpPr>
+        <a:xfrm>
+          <a:off x="0" y="0"/>
+          <a:ext cx="0" cy="0"/>
+          <a:chOff x="0" y="0"/>
+          <a:chExt cx="0" cy="0"/>
+        </a:xfrm>
+      </p:grpSpPr>
+      <p:sp>
+        <p:nvSpPr>
+          <p:cNvPr id="2" name="讲课提示"/>
+          <p:cNvSpPr txBox="1"/>
+          <p:nvPr/>
+        </p:nvSpPr>
+        <p:spPr>
+          <a:xfrm>
+            <a:off x="457200" y="457200"/>
+            <a:ext cx="6858000" cy="4800600"/>
+          </a:xfrm>
+          <a:prstGeom prst="rect">
+            <a:avLst/>
+          </a:prstGeom>
+        </p:spPr>
+        <p:txBody>
+          <a:bodyPr wrap="square"/>
+          <a:lstStyle/>
+          <a:p>
+            <a:r>
+              <a:rPr lang="zh-CN" dirty="0"/>
+              <a:t>第 91 节 · Hacker News API 与动手实战</a:t>
+            </a:r>
+          </a:p>
+          <a:p>
+            <a:r>
+              <a:rPr lang="zh-CN" dirty="0"/>
+              <a:t>单元 17 · 使用 API 与 Plotly · W22</a:t>
+            </a:r>
+          </a:p>
+          <a:p>
+            <a:r>
+              <a:rPr lang="zh-CN" dirty="0"/>
+              <a:t/>
+            </a:r>
+          </a:p>
+          <a:p>
+            <a:r>
+              <a:rPr lang="zh-CN" dirty="0"/>
+              <a:t>学习目标：掌握「先拿列表再取详情」的两段式调用；给 API 调用加容错</a:t>
+            </a:r>
+          </a:p>
+          <a:p>
+            <a:r>
+              <a:rPr lang="zh-CN" dirty="0"/>
+              <a:t/>
+            </a:r>
+          </a:p>
+          <a:p>
+            <a:r>
+              <a:rPr lang="zh-CN" dirty="0"/>
+              <a:t>课堂实操（40 分钟，不看答案）：</a:t>
+            </a:r>
+          </a:p>
+          <a:p>
+            <a:r>
+              <a:rPr lang="zh-CN" dirty="0"/>
+              <a:t>· 实现 Hacker News 抓取</a:t>
+            </a:r>
+          </a:p>
+          <a:p>
+            <a:r>
+              <a:rPr lang="zh-CN" dirty="0"/>
+              <a:t>· 故意让某个 id 请求失败，看程序会不会崩</a:t>
+            </a:r>
+          </a:p>
+          <a:p>
+            <a:r>
+              <a:rPr lang="zh-CN" dirty="0"/>
+              <a:t/>
+            </a:r>
+          </a:p>
+          <a:p>
+            <a:r>
+              <a:rPr lang="zh-CN" dirty="0"/>
+              <a:t>课后作业：</a:t>
+            </a:r>
+          </a:p>
+          <a:p>
+            <a:r>
+              <a:rPr lang="zh-CN" dirty="0"/>
+              <a:t>· ★ 产出：能拉 GitHub 数据并出交互图的脚本</a:t>
+            </a:r>
+          </a:p>
+          <a:p>
+            <a:r>
+              <a:rPr lang="zh-CN" dirty="0"/>
+              <a:t/>
+            </a:r>
+          </a:p>
+          <a:p>
+            <a:r>
+              <a:rPr lang="zh-CN" dirty="0"/>
+              <a:t>节奏：讲 20 分钟 → 学员自己敲 40 分钟（不看答案）→ 对讲评自查 20 分钟 → 写作业 10 分钟。</a:t>
+            </a:r>
+          </a:p>
+        </p:txBody>
+      </p:sp>
+    </p:spTree>
+  </p:cSld>
+  <p:clrMapOvr>
+    <a:masterClrMapping/>
+  </p:clrMapOvr>
+</p:notes>
+</file>
+
+<file path=ppt/notesSlides/notesSlide9.xml><?xml version="1.0" encoding="utf-8"?>
+<p:notes xmlns:a="http://schemas.openxmlformats.org/drawingml/2006/main" xmlns:p="http://schemas.openxmlformats.org/presentationml/2006/main" xmlns:r="http://schemas.openxmlformats.org/officeDocument/2006/relationships">
+  <p:cSld>
+    <p:spTree>
+      <p:nvGrpSpPr>
+        <p:cNvPr id="1" name=""/>
+        <p:cNvGrpSpPr/>
+        <p:nvPr/>
+      </p:nvGrpSpPr>
+      <p:grpSpPr>
+        <a:xfrm>
+          <a:off x="0" y="0"/>
+          <a:ext cx="0" cy="0"/>
+          <a:chOff x="0" y="0"/>
+          <a:chExt cx="0" cy="0"/>
+        </a:xfrm>
+      </p:grpSpPr>
+      <p:sp>
+        <p:nvSpPr>
+          <p:cNvPr id="2" name="讲课提示"/>
+          <p:cNvSpPr txBox="1"/>
+          <p:nvPr/>
+        </p:nvSpPr>
+        <p:spPr>
+          <a:xfrm>
+            <a:off x="457200" y="457200"/>
+            <a:ext cx="6858000" cy="4800600"/>
+          </a:xfrm>
+          <a:prstGeom prst="rect">
+            <a:avLst/>
+          </a:prstGeom>
+        </p:spPr>
+        <p:txBody>
+          <a:bodyPr wrap="square"/>
+          <a:lstStyle/>
+          <a:p>
+            <a:r>
+              <a:rPr lang="zh-CN" dirty="0"/>
+              <a:t>第 91 节 · 核心知识点：Hacker News API 与动手实战</a:t>
+            </a:r>
+          </a:p>
+          <a:p>
+            <a:r>
+              <a:rPr lang="zh-CN" dirty="0"/>
+              <a:t/>
+            </a:r>
+          </a:p>
+          <a:p>
+            <a:r>
+              <a:rPr lang="zh-CN" dirty="0"/>
+              <a:t>讲这一页时：先让学生说出上节课的结论，再逐块讲要点。</a:t>
+            </a:r>
+          </a:p>
+          <a:p>
+            <a:r>
+              <a:rPr lang="zh-CN" dirty="0"/>
+              <a:t>每讲完一块，问一句「这一步如果写错了，报错会长什么样？」——把错误提前讲。</a:t>
+            </a:r>
+          </a:p>
+          <a:p>
+            <a:r>
+              <a:rPr lang="zh-CN" dirty="0"/>
+              <a:t/>
+            </a:r>
+          </a:p>
+          <a:p>
+            <a:r>
+              <a:rPr lang="zh-CN" dirty="0"/>
+              <a:t>本节目标：掌握「先拿列表再取详情」的两段式调用；给 API 调用加容错</a:t>
+            </a:r>
+          </a:p>
+          <a:p>
+            <a:r>
+              <a:rPr lang="zh-CN" dirty="0"/>
+              <a:t/>
+            </a:r>
+          </a:p>
+          <a:p>
+            <a:r>
+              <a:rPr lang="zh-CN" dirty="0"/>
+              <a:t>看不到懂的地方，回讲义对应小节读一遍，再回来对着这页复述一次——能讲出来才算真懂。</a:t>
+            </a:r>
+          </a:p>
+        </p:txBody>
+      </p:sp>
+    </p:spTree>
+  </p:cSld>
+  <p:clrMapOvr>
+    <a:masterClrMapping/>
+  </p:clrMapOvr>
+</p:notes>
 </file>
 
 <file path=ppt/slideLayouts/slideLayout1.xml><?xml version="1.0" encoding="utf-8"?>
